--- a/docs/dolbom_studio_소개.pptx
+++ b/docs/dolbom_studio_소개.pptx
@@ -18,9 +18,10 @@
     <p:sldId id="266" r:id="rId12"/>
     <p:sldId id="267" r:id="rId13"/>
     <p:sldId id="268" r:id="rId14"/>
+    <p:sldId id="269" r:id="rId15"/>
   </p:sldIdLst>
   <p:notesMasterIdLst>
-    <p:notesMasterId r:id="rId15"/>
+    <p:notesMasterId r:id="rId16"/>
   </p:notesMasterIdLst>
   <p:sldSz cx="12161520" cy="6858000"/>
   <p:notesSz cx="6858000" cy="12161520"/>
@@ -778,7 +779,7 @@
           <a:p>
             <a:r>
               <a:rPr lang="en-US" dirty="0"/>
-              <a:t>dolbom studio 브랜딩 — 정체성과 색을 입혀 '우리 도구'다운 느낌으로 마무리.</a:t>
+              <a:t>Dolbom Studio 브랜딩 — 정체성과 색을 입혀 '우리 도구'다운 감성으로.</a:t>
             </a:r>
             <a:endParaRPr lang="en-US" dirty="0"/>
           </a:p>
@@ -866,7 +867,7 @@
           <a:p>
             <a:r>
               <a:rPr lang="en-US" dirty="0"/>
-              <a:t>마무리: 효과 요약과 향후 과제. 계속 개선 중.</a:t>
+              <a:t>개인 계정 로그인 + 모바일/PWA — 누가 뭘 했는지 계정 기반으로 명확히 + 팀원이 폰으로 쉽게 쓰게.</a:t>
             </a:r>
             <a:endParaRPr lang="en-US" dirty="0"/>
           </a:p>
@@ -890,6 +891,94 @@
             <a:fld id="{F7021451-1387-4CA6-816F-3879F97B5CBC}" type="slidenum">
               <a:rPr lang="en-US"/>
               <a:t>13</a:t>
+            </a:fld>
+            <a:endParaRPr lang="en-US"/>
+          </a:p>
+        </p:txBody>
+      </p:sp>
+    </p:spTree>
+    <p:extLst>
+      <p:ext uri="{BB962C8B-B14F-4D97-AF65-F5344CB8AC3E}">
+        <p14:creationId xmlns:p14="http://schemas.microsoft.com/office/powerpoint/2010/main" val="1024086991"/>
+      </p:ext>
+    </p:extLst>
+  </p:cSld>
+  <p:clrMapOvr>
+    <a:masterClrMapping/>
+  </p:clrMapOvr>
+</p:notes>
+</file>
+
+<file path=ppt/notesSlides/notesSlide14.xml><?xml version="1.0" encoding="utf-8"?>
+<p:notes xmlns:a="http://schemas.openxmlformats.org/drawingml/2006/main" xmlns:r="http://schemas.openxmlformats.org/officeDocument/2006/relationships" xmlns:p="http://schemas.openxmlformats.org/presentationml/2006/main">
+  <p:cSld>
+    <p:spTree>
+      <p:nvGrpSpPr>
+        <p:cNvPr id="1" name=""/>
+        <p:cNvGrpSpPr/>
+        <p:nvPr/>
+      </p:nvGrpSpPr>
+      <p:grpSpPr>
+        <a:xfrm>
+          <a:off x="0" y="0"/>
+          <a:ext cx="0" cy="0"/>
+          <a:chOff x="0" y="0"/>
+          <a:chExt cx="0" cy="0"/>
+        </a:xfrm>
+      </p:grpSpPr>
+      <p:sp>
+        <p:nvSpPr>
+          <p:cNvPr id="2" name="Slide Image Placeholder 1"/>
+          <p:cNvSpPr>
+            <a:spLocks noGrp="1" noRot="1" noChangeAspect="1"/>
+          </p:cNvSpPr>
+          <p:nvPr>
+            <p:ph type="sldImg"/>
+          </p:nvPr>
+        </p:nvSpPr>
+        <p:spPr/>
+      </p:sp>
+      <p:sp>
+        <p:nvSpPr>
+          <p:cNvPr id="3" name="Notes Placeholder 2"/>
+          <p:cNvSpPr>
+            <a:spLocks noGrp="1"/>
+          </p:cNvSpPr>
+          <p:nvPr>
+            <p:ph type="body" idx="1"/>
+          </p:nvPr>
+        </p:nvSpPr>
+        <p:spPr/>
+        <p:txBody>
+          <a:bodyPr/>
+          <a:lstStyle/>
+          <a:p>
+            <a:r>
+              <a:rPr lang="en-US" dirty="0"/>
+              <a:t>마무리: 효과 요약과 향후 과제. 계속 개선 중.</a:t>
+            </a:r>
+            <a:endParaRPr lang="en-US" dirty="0"/>
+          </a:p>
+        </p:txBody>
+      </p:sp>
+      <p:sp>
+        <p:nvSpPr>
+          <p:cNvPr id="4" name="Slide Number Placeholder 3"/>
+          <p:cNvSpPr>
+            <a:spLocks noGrp="1"/>
+          </p:cNvSpPr>
+          <p:nvPr>
+            <p:ph type="sldNum" sz="quarter" idx="10"/>
+          </p:nvPr>
+        </p:nvSpPr>
+        <p:spPr/>
+        <p:txBody>
+          <a:bodyPr/>
+          <a:lstStyle/>
+          <a:p>
+            <a:fld id="{F7021451-1387-4CA6-816F-3879F97B5CBC}" type="slidenum">
+              <a:rPr lang="en-US"/>
+              <a:t>14</a:t>
             </a:fld>
             <a:endParaRPr lang="en-US"/>
           </a:p>
@@ -1218,7 +1307,7 @@
           <a:p>
             <a:r>
               <a:rPr lang="en-US" dirty="0"/>
-              <a:t>7단계로 압축한 변천사. 다음 슬라이드부터 각 단계의 화면과 이유.</a:t>
+              <a:t>8단계로 압축한 변천사. 다음 슬라이드부터 각 단계의 화면과 이유.</a:t>
             </a:r>
             <a:endParaRPr lang="en-US" dirty="0"/>
           </a:p>
@@ -3711,7 +3800,7 @@
                 <a:ea typeface="Malgun Gothic" pitchFamily="34" charset="-122"/>
                 <a:cs typeface="Malgun Gothic" pitchFamily="34" charset="-120"/>
               </a:rPr>
-              <a:t>dolbom studio 브랜딩</a:t>
+              <a:t>Dolbom Studio 브랜딩</a:t>
             </a:r>
             <a:endParaRPr lang="en-US" sz="2500" dirty="0"/>
           </a:p>
@@ -3793,7 +3882,7 @@
                 <a:ea typeface="Malgun Gothic" pitchFamily="34" charset="-122"/>
                 <a:cs typeface="Malgun Gothic" pitchFamily="34" charset="-120"/>
               </a:rPr>
-              <a:t>사이트 이름 dolbom studio (탭·로그인·사이드바)</a:t>
+              <a:t>사이트 이름 Dolbom Studio + 주황 DS 배지(파비콘/홈화면)</a:t>
             </a:r>
             <a:endParaRPr lang="en-US" sz="1300" dirty="0"/>
           </a:p>
@@ -3814,7 +3903,7 @@
                 <a:ea typeface="Malgun Gothic" pitchFamily="34" charset="-122"/>
                 <a:cs typeface="Malgun Gothic" pitchFamily="34" charset="-120"/>
               </a:rPr>
-              <a:t>주황/갈색 테마(primaryColor) · 바로가기 아이콘 크게·박스 없이</a:t>
+              <a:t>정중앙 Dancing Script 워드마크 · 주황/갈색 테마 · 다크 사이드바</a:t>
             </a:r>
             <a:endParaRPr lang="en-US" sz="1300" dirty="0"/>
           </a:p>
@@ -3835,7 +3924,7 @@
                 <a:ea typeface="Malgun Gothic" pitchFamily="34" charset="-122"/>
                 <a:cs typeface="Malgun Gothic" pitchFamily="34" charset="-120"/>
               </a:rPr>
-              <a:t>공지등록을 바로가기 첫 타일로</a:t>
+              <a:t>바로가기 아이콘 크게(HTML 타일)·중앙정렬</a:t>
             </a:r>
             <a:endParaRPr lang="en-US" sz="1300" dirty="0"/>
           </a:p>
@@ -3940,7 +4029,7 @@
                 <a:ea typeface="Malgun Gothic" pitchFamily="34" charset="-122"/>
                 <a:cs typeface="Malgun Gothic" pitchFamily="34" charset="-120"/>
               </a:rPr>
-              <a:t>정체성과 색을 입혀 '우리 도구'다운 느낌으로 마무리.</a:t>
+              <a:t>정체성과 색을 입혀 '우리 도구'다운 감성으로.</a:t>
             </a:r>
             <a:endParaRPr lang="en-US" sz="1250" dirty="0"/>
           </a:p>
@@ -4024,7 +4113,7 @@
                 <a:ea typeface="Malgun Gothic" pitchFamily="34" charset="-122"/>
                 <a:cs typeface="Malgun Gothic" pitchFamily="34" charset="-120"/>
               </a:rPr>
-              <a:t>이름·주황/갈색 테마·네이버식 아이콘
+              <a:t>DS 아이콘 · 주황 테마 · Dancing Script 워드마크
 </a:t>
             </a:r>
             <a:endParaRPr lang="en-US" sz="1500" dirty="0"/>
@@ -4059,6 +4148,506 @@
 <file path=ppt/slides/slide13.xml><?xml version="1.0" encoding="utf-8"?>
 <p:sld xmlns:a="http://schemas.openxmlformats.org/drawingml/2006/main" xmlns:r="http://schemas.openxmlformats.org/officeDocument/2006/relationships" xmlns:p="http://schemas.openxmlformats.org/presentationml/2006/main">
   <p:cSld name="Slide 13">
+    <p:bg>
+      <p:bgPr>
+        <a:solidFill>
+          <a:srgbClr val="FFFFFF"/>
+        </a:solidFill>
+      </p:bgPr>
+    </p:bg>
+    <p:spTree>
+      <p:nvGrpSpPr>
+        <p:cNvPr id="1" name=""/>
+        <p:cNvGrpSpPr/>
+        <p:nvPr/>
+      </p:nvGrpSpPr>
+      <p:grpSpPr>
+        <a:xfrm>
+          <a:off x="0" y="0"/>
+          <a:ext cx="0" cy="0"/>
+          <a:chOff x="0" y="0"/>
+          <a:chExt cx="0" cy="0"/>
+        </a:xfrm>
+      </p:grpSpPr>
+      <p:sp>
+        <p:nvSpPr>
+          <p:cNvPr id="2" name="Shape 0"/>
+          <p:cNvSpPr/>
+          <p:nvPr/>
+        </p:nvSpPr>
+        <p:spPr>
+          <a:xfrm>
+            <a:off x="640080" y="566928"/>
+            <a:ext cx="658368" cy="658368"/>
+          </a:xfrm>
+          <a:prstGeom prst="ellipse">
+            <a:avLst/>
+          </a:prstGeom>
+          <a:solidFill>
+            <a:srgbClr val="C4622D"/>
+          </a:solidFill>
+          <a:ln/>
+        </p:spPr>
+      </p:sp>
+      <p:sp>
+        <p:nvSpPr>
+          <p:cNvPr id="3" name="Text 1"/>
+          <p:cNvSpPr/>
+          <p:nvPr/>
+        </p:nvSpPr>
+        <p:spPr>
+          <a:xfrm>
+            <a:off x="640080" y="566928"/>
+            <a:ext cx="658368" cy="658368"/>
+          </a:xfrm>
+          <a:prstGeom prst="rect">
+            <a:avLst/>
+          </a:prstGeom>
+          <a:noFill/>
+          <a:ln/>
+        </p:spPr>
+        <p:txBody>
+          <a:bodyPr wrap="square" lIns="0" tIns="0" rIns="0" bIns="0" rtlCol="0" anchor="ctr"/>
+          <a:lstStyle/>
+          <a:p>
+            <a:pPr algn="ctr" indent="0" marL="0">
+              <a:buNone/>
+            </a:pPr>
+            <a:r>
+              <a:rPr lang="en-US" sz="2600" b="1" dirty="0">
+                <a:solidFill>
+                  <a:srgbClr val="FFFFFF"/>
+                </a:solidFill>
+                <a:latin typeface="Malgun Gothic" pitchFamily="34" charset="0"/>
+                <a:ea typeface="Malgun Gothic" pitchFamily="34" charset="-122"/>
+                <a:cs typeface="Malgun Gothic" pitchFamily="34" charset="-120"/>
+              </a:rPr>
+              <a:t>8</a:t>
+            </a:r>
+            <a:endParaRPr lang="en-US" sz="2600" dirty="0"/>
+          </a:p>
+        </p:txBody>
+      </p:sp>
+      <p:sp>
+        <p:nvSpPr>
+          <p:cNvPr id="4" name="Text 2"/>
+          <p:cNvSpPr/>
+          <p:nvPr/>
+        </p:nvSpPr>
+        <p:spPr>
+          <a:xfrm>
+            <a:off x="1508760" y="530352"/>
+            <a:ext cx="7315200" cy="274320"/>
+          </a:xfrm>
+          <a:prstGeom prst="rect">
+            <a:avLst/>
+          </a:prstGeom>
+          <a:noFill/>
+          <a:ln/>
+        </p:spPr>
+        <p:txBody>
+          <a:bodyPr wrap="square" lIns="0" tIns="0" rIns="0" bIns="0" rtlCol="0" anchor="ctr"/>
+          <a:lstStyle/>
+          <a:p>
+            <a:pPr indent="0" marL="0">
+              <a:buNone/>
+            </a:pPr>
+            <a:r>
+              <a:rPr lang="en-US" sz="1150" b="1" spc="100" kern="0" dirty="0">
+                <a:solidFill>
+                  <a:srgbClr val="8A7A6B"/>
+                </a:solidFill>
+                <a:latin typeface="Malgun Gothic" pitchFamily="34" charset="0"/>
+                <a:ea typeface="Malgun Gothic" pitchFamily="34" charset="-122"/>
+                <a:cs typeface="Malgun Gothic" pitchFamily="34" charset="-120"/>
+              </a:rPr>
+              <a:t>STAGE 8 · 2026.07.09</a:t>
+            </a:r>
+            <a:endParaRPr lang="en-US" sz="1150" dirty="0"/>
+          </a:p>
+        </p:txBody>
+      </p:sp>
+      <p:sp>
+        <p:nvSpPr>
+          <p:cNvPr id="5" name="Text 3"/>
+          <p:cNvSpPr/>
+          <p:nvPr/>
+        </p:nvSpPr>
+        <p:spPr>
+          <a:xfrm>
+            <a:off x="1508760" y="786384"/>
+            <a:ext cx="9555480" cy="548640"/>
+          </a:xfrm>
+          <a:prstGeom prst="rect">
+            <a:avLst/>
+          </a:prstGeom>
+          <a:noFill/>
+          <a:ln/>
+        </p:spPr>
+        <p:txBody>
+          <a:bodyPr wrap="square" lIns="0" tIns="0" rIns="0" bIns="0" rtlCol="0" anchor="ctr"/>
+          <a:lstStyle/>
+          <a:p>
+            <a:pPr indent="0" marL="0">
+              <a:buNone/>
+            </a:pPr>
+            <a:r>
+              <a:rPr lang="en-US" sz="2500" b="1" dirty="0">
+                <a:solidFill>
+                  <a:srgbClr val="5A3A24"/>
+                </a:solidFill>
+                <a:latin typeface="Malgun Gothic" pitchFamily="34" charset="0"/>
+                <a:ea typeface="Malgun Gothic" pitchFamily="34" charset="-122"/>
+                <a:cs typeface="Malgun Gothic" pitchFamily="34" charset="-120"/>
+              </a:rPr>
+              <a:t>개인 계정 로그인 + 모바일/PWA</a:t>
+            </a:r>
+            <a:endParaRPr lang="en-US" sz="2500" dirty="0"/>
+          </a:p>
+        </p:txBody>
+      </p:sp>
+      <p:sp>
+        <p:nvSpPr>
+          <p:cNvPr id="6" name="Text 4"/>
+          <p:cNvSpPr/>
+          <p:nvPr/>
+        </p:nvSpPr>
+        <p:spPr>
+          <a:xfrm>
+            <a:off x="640080" y="1691640"/>
+            <a:ext cx="4663440" cy="320040"/>
+          </a:xfrm>
+          <a:prstGeom prst="rect">
+            <a:avLst/>
+          </a:prstGeom>
+          <a:noFill/>
+          <a:ln/>
+        </p:spPr>
+        <p:txBody>
+          <a:bodyPr wrap="square" lIns="0" tIns="0" rIns="0" bIns="0" rtlCol="0" anchor="ctr"/>
+          <a:lstStyle/>
+          <a:p>
+            <a:pPr indent="0" marL="0">
+              <a:buNone/>
+            </a:pPr>
+            <a:r>
+              <a:rPr lang="en-US" sz="1400" b="1" dirty="0">
+                <a:solidFill>
+                  <a:srgbClr val="C4622D"/>
+                </a:solidFill>
+                <a:latin typeface="Malgun Gothic" pitchFamily="34" charset="0"/>
+                <a:ea typeface="Malgun Gothic" pitchFamily="34" charset="-122"/>
+                <a:cs typeface="Malgun Gothic" pitchFamily="34" charset="-120"/>
+              </a:rPr>
+              <a:t>무엇을 바꿨나</a:t>
+            </a:r>
+            <a:endParaRPr lang="en-US" sz="1400" dirty="0"/>
+          </a:p>
+        </p:txBody>
+      </p:sp>
+      <p:sp>
+        <p:nvSpPr>
+          <p:cNvPr id="7" name="Text 5"/>
+          <p:cNvSpPr/>
+          <p:nvPr/>
+        </p:nvSpPr>
+        <p:spPr>
+          <a:xfrm>
+            <a:off x="640080" y="2057400"/>
+            <a:ext cx="4663440" cy="2377440"/>
+          </a:xfrm>
+          <a:prstGeom prst="rect">
+            <a:avLst/>
+          </a:prstGeom>
+          <a:noFill/>
+          <a:ln/>
+        </p:spPr>
+        <p:txBody>
+          <a:bodyPr wrap="square" rtlCol="0" anchor="t"/>
+          <a:lstStyle/>
+          <a:p>
+            <a:pPr marL="177800" indent="-177800">
+              <a:spcAft>
+                <a:spcPts val="600"/>
+              </a:spcAft>
+              <a:buSzPct val="100000"/>
+              <a:buChar char="•"/>
+            </a:pPr>
+            <a:r>
+              <a:rPr lang="en-US" sz="1300" dirty="0">
+                <a:solidFill>
+                  <a:srgbClr val="33291F"/>
+                </a:solidFill>
+                <a:latin typeface="Malgun Gothic" pitchFamily="34" charset="0"/>
+                <a:ea typeface="Malgun Gothic" pitchFamily="34" charset="-122"/>
+                <a:cs typeface="Malgun Gothic" pitchFamily="34" charset="-120"/>
+              </a:rPr>
+              <a:t>공용 비번 폐지 → 개인 계정(회원가입·관리자 승인·로그인), 비번 해시</a:t>
+            </a:r>
+            <a:endParaRPr lang="en-US" sz="1300" dirty="0"/>
+          </a:p>
+          <a:p>
+            <a:pPr marL="177800" indent="-177800">
+              <a:spcAft>
+                <a:spcPts val="600"/>
+              </a:spcAft>
+              <a:buSzPct val="100000"/>
+              <a:buChar char="•"/>
+            </a:pPr>
+            <a:r>
+              <a:rPr lang="en-US" sz="1300" dirty="0">
+                <a:solidFill>
+                  <a:srgbClr val="33291F"/>
+                </a:solidFill>
+                <a:latin typeface="Malgun Gothic" pitchFamily="34" charset="0"/>
+                <a:ea typeface="Malgun Gothic" pitchFamily="34" charset="-122"/>
+                <a:cs typeface="Malgun Gothic" pitchFamily="34" charset="-120"/>
+              </a:rPr>
+              <a:t>로그인=본인 → '나는 누구' 선택칸 제거, 폼에 이름 자동. 로그인 정보 저장</a:t>
+            </a:r>
+            <a:endParaRPr lang="en-US" sz="1300" dirty="0"/>
+          </a:p>
+          <a:p>
+            <a:pPr marL="177800" indent="-177800">
+              <a:spcAft>
+                <a:spcPts val="600"/>
+              </a:spcAft>
+              <a:buSzPct val="100000"/>
+              <a:buChar char="•"/>
+            </a:pPr>
+            <a:r>
+              <a:rPr lang="en-US" sz="1300" dirty="0">
+                <a:solidFill>
+                  <a:srgbClr val="33291F"/>
+                </a:solidFill>
+                <a:latin typeface="Malgun Gothic" pitchFamily="34" charset="0"/>
+                <a:ea typeface="Malgun Gothic" pitchFamily="34" charset="-122"/>
+                <a:cs typeface="Malgun Gothic" pitchFamily="34" charset="-120"/>
+              </a:rPr>
+              <a:t>모바일 반응형 + 홈 화면에 추가(PWA)로 폰에서 앱처럼</a:t>
+            </a:r>
+            <a:endParaRPr lang="en-US" sz="1300" dirty="0"/>
+          </a:p>
+        </p:txBody>
+      </p:sp>
+      <p:sp>
+        <p:nvSpPr>
+          <p:cNvPr id="8" name="Shape 6"/>
+          <p:cNvSpPr/>
+          <p:nvPr/>
+        </p:nvSpPr>
+        <p:spPr>
+          <a:xfrm>
+            <a:off x="640080" y="4709160"/>
+            <a:ext cx="4663440" cy="1600200"/>
+          </a:xfrm>
+          <a:prstGeom prst="roundRect">
+            <a:avLst>
+              <a:gd name="adj" fmla="val 5143"/>
+            </a:avLst>
+          </a:prstGeom>
+          <a:solidFill>
+            <a:srgbClr val="F7F0E8"/>
+          </a:solidFill>
+          <a:ln w="12700">
+            <a:solidFill>
+              <a:srgbClr val="E4D5C4"/>
+            </a:solidFill>
+            <a:prstDash val="solid"/>
+          </a:ln>
+        </p:spPr>
+      </p:sp>
+      <p:sp>
+        <p:nvSpPr>
+          <p:cNvPr id="9" name="Text 7"/>
+          <p:cNvSpPr/>
+          <p:nvPr/>
+        </p:nvSpPr>
+        <p:spPr>
+          <a:xfrm>
+            <a:off x="868680" y="4846320"/>
+            <a:ext cx="4206240" cy="320040"/>
+          </a:xfrm>
+          <a:prstGeom prst="rect">
+            <a:avLst/>
+          </a:prstGeom>
+          <a:noFill/>
+          <a:ln/>
+        </p:spPr>
+        <p:txBody>
+          <a:bodyPr wrap="square" lIns="0" tIns="0" rIns="0" bIns="0" rtlCol="0" anchor="ctr"/>
+          <a:lstStyle/>
+          <a:p>
+            <a:pPr indent="0" marL="0">
+              <a:buNone/>
+            </a:pPr>
+            <a:r>
+              <a:rPr lang="en-US" sz="1300" b="1" dirty="0">
+                <a:solidFill>
+                  <a:srgbClr val="C4622D"/>
+                </a:solidFill>
+                <a:latin typeface="Malgun Gothic" pitchFamily="34" charset="0"/>
+                <a:ea typeface="Malgun Gothic" pitchFamily="34" charset="-122"/>
+                <a:cs typeface="Malgun Gothic" pitchFamily="34" charset="-120"/>
+              </a:rPr>
+              <a:t>왜</a:t>
+            </a:r>
+            <a:endParaRPr lang="en-US" sz="1300" dirty="0"/>
+          </a:p>
+        </p:txBody>
+      </p:sp>
+      <p:sp>
+        <p:nvSpPr>
+          <p:cNvPr id="10" name="Text 8"/>
+          <p:cNvSpPr/>
+          <p:nvPr/>
+        </p:nvSpPr>
+        <p:spPr>
+          <a:xfrm>
+            <a:off x="868680" y="5166360"/>
+            <a:ext cx="4206240" cy="1051560"/>
+          </a:xfrm>
+          <a:prstGeom prst="rect">
+            <a:avLst/>
+          </a:prstGeom>
+          <a:noFill/>
+          <a:ln/>
+        </p:spPr>
+        <p:txBody>
+          <a:bodyPr wrap="square" lIns="0" tIns="0" rIns="0" bIns="0" rtlCol="0" anchor="t"/>
+          <a:lstStyle/>
+          <a:p>
+            <a:pPr indent="0" marL="0">
+              <a:buNone/>
+            </a:pPr>
+            <a:r>
+              <a:rPr lang="en-US" sz="1250" dirty="0">
+                <a:solidFill>
+                  <a:srgbClr val="33291F"/>
+                </a:solidFill>
+                <a:latin typeface="Malgun Gothic" pitchFamily="34" charset="0"/>
+                <a:ea typeface="Malgun Gothic" pitchFamily="34" charset="-122"/>
+                <a:cs typeface="Malgun Gothic" pitchFamily="34" charset="-120"/>
+              </a:rPr>
+              <a:t>누가 뭘 했는지 계정 기반으로 명확히 + 팀원이 폰으로 쉽게 쓰게.</a:t>
+            </a:r>
+            <a:endParaRPr lang="en-US" sz="1250" dirty="0"/>
+          </a:p>
+        </p:txBody>
+      </p:sp>
+      <p:sp>
+        <p:nvSpPr>
+          <p:cNvPr id="11" name="Shape 9"/>
+          <p:cNvSpPr/>
+          <p:nvPr/>
+        </p:nvSpPr>
+        <p:spPr>
+          <a:xfrm>
+            <a:off x="5760720" y="1691640"/>
+            <a:ext cx="5760720" cy="4617720"/>
+          </a:xfrm>
+          <a:prstGeom prst="roundRect">
+            <a:avLst>
+              <a:gd name="adj" fmla="val 1584"/>
+            </a:avLst>
+          </a:prstGeom>
+          <a:solidFill>
+            <a:srgbClr val="F1E4D3"/>
+          </a:solidFill>
+          <a:ln w="15875">
+            <a:solidFill>
+              <a:srgbClr val="E08A3C"/>
+            </a:solidFill>
+            <a:prstDash val="dash"/>
+          </a:ln>
+        </p:spPr>
+      </p:sp>
+      <p:sp>
+        <p:nvSpPr>
+          <p:cNvPr id="12" name="Text 10"/>
+          <p:cNvSpPr/>
+          <p:nvPr/>
+        </p:nvSpPr>
+        <p:spPr>
+          <a:xfrm>
+            <a:off x="5943600" y="1691640"/>
+            <a:ext cx="5394960" cy="4617720"/>
+          </a:xfrm>
+          <a:prstGeom prst="rect">
+            <a:avLst/>
+          </a:prstGeom>
+          <a:noFill/>
+          <a:ln/>
+        </p:spPr>
+        <p:txBody>
+          <a:bodyPr wrap="square" rtlCol="0" anchor="ctr"/>
+          <a:lstStyle/>
+          <a:p>
+            <a:pPr algn="ctr" indent="0" marL="0">
+              <a:buNone/>
+            </a:pPr>
+            <a:r>
+              <a:rPr lang="en-US" sz="1500" b="1" dirty="0">
+                <a:solidFill>
+                  <a:srgbClr val="5A3A24"/>
+                </a:solidFill>
+                <a:latin typeface="Malgun Gothic" pitchFamily="34" charset="0"/>
+                <a:ea typeface="Malgun Gothic" pitchFamily="34" charset="-122"/>
+                <a:cs typeface="Malgun Gothic" pitchFamily="34" charset="-120"/>
+              </a:rPr>
+              <a:t>📷  스크린샷 자리
+</a:t>
+            </a:r>
+            <a:endParaRPr lang="en-US" sz="1500" dirty="0"/>
+          </a:p>
+          <a:p>
+            <a:pPr algn="ctr" indent="0" marL="0">
+              <a:buNone/>
+            </a:pPr>
+            <a:r>
+              <a:rPr lang="en-US" sz="1200" dirty="0">
+                <a:solidFill>
+                  <a:srgbClr val="5A3A24"/>
+                </a:solidFill>
+                <a:latin typeface="Malgun Gothic" pitchFamily="34" charset="0"/>
+                <a:ea typeface="Malgun Gothic" pitchFamily="34" charset="-122"/>
+                <a:cs typeface="Malgun Gothic" pitchFamily="34" charset="-120"/>
+              </a:rPr>
+              <a:t>회원가입·관리자 승인 로그인 + 폰에서 앱처럼
+</a:t>
+            </a:r>
+            <a:endParaRPr lang="en-US" sz="1500" dirty="0"/>
+          </a:p>
+          <a:p>
+            <a:pPr algn="ctr" indent="0" marL="0">
+              <a:buNone/>
+            </a:pPr>
+            <a:r>
+              <a:rPr lang="en-US" sz="950" i="1" dirty="0">
+                <a:solidFill>
+                  <a:srgbClr val="8A7A6B"/>
+                </a:solidFill>
+                <a:latin typeface="Malgun Gothic" pitchFamily="34" charset="0"/>
+                <a:ea typeface="Malgun Gothic" pitchFamily="34" charset="-122"/>
+                <a:cs typeface="Malgun Gothic" pitchFamily="34" charset="-120"/>
+              </a:rPr>
+              <a:t>docs/screenshots/stage8.png 저장 시 자동 삽입</a:t>
+            </a:r>
+            <a:endParaRPr lang="en-US" sz="1500" dirty="0"/>
+          </a:p>
+        </p:txBody>
+      </p:sp>
+    </p:spTree>
+  </p:cSld>
+  <p:clrMapOvr>
+    <a:masterClrMapping/>
+  </p:clrMapOvr>
+</p:sld>
+</file>
+
+<file path=ppt/slides/slide14.xml><?xml version="1.0" encoding="utf-8"?>
+<p:sld xmlns:a="http://schemas.openxmlformats.org/drawingml/2006/main" xmlns:r="http://schemas.openxmlformats.org/officeDocument/2006/relationships" xmlns:p="http://schemas.openxmlformats.org/presentationml/2006/main">
+  <p:cSld name="Slide 14">
     <p:bg>
       <p:bgPr>
         <a:solidFill>
@@ -4303,7 +4892,7 @@
                 <a:ea typeface="Malgun Gothic" pitchFamily="34" charset="-122"/>
                 <a:cs typeface="Malgun Gothic" pitchFamily="34" charset="-120"/>
               </a:rPr>
-              <a:t>이름 1회 → 전 페이지 자동</a:t>
+              <a:t>개인 계정 로그인 → 폼에 이름 자동</a:t>
             </a:r>
             <a:endParaRPr lang="en-US" sz="1300" dirty="0"/>
           </a:p>
@@ -4324,7 +4913,7 @@
                 <a:ea typeface="Malgun Gothic" pitchFamily="34" charset="-122"/>
                 <a:cs typeface="Malgun Gothic" pitchFamily="34" charset="-120"/>
               </a:rPr>
-              <a:t>담당자 없이 전원 사용 · 운영비 0원</a:t>
+              <a:t>폰에서 앱처럼(홈 화면 추가) · 운영비 0원</a:t>
             </a:r>
             <a:endParaRPr lang="en-US" sz="1300" dirty="0"/>
           </a:p>
@@ -4475,7 +5064,7 @@
                 <a:ea typeface="Malgun Gothic" pitchFamily="34" charset="-122"/>
                 <a:cs typeface="Malgun Gothic" pitchFamily="34" charset="-120"/>
               </a:rPr>
-              <a:t>공통확인 표를 메인 취합본에 통합</a:t>
+              <a:t>모바일 최적화 2차 · 자동로그인 신뢰성</a:t>
             </a:r>
             <a:endParaRPr lang="en-US" sz="1300" dirty="0"/>
           </a:p>
@@ -4496,7 +5085,7 @@
                 <a:ea typeface="Malgun Gothic" pitchFamily="34" charset="-122"/>
                 <a:cs typeface="Malgun Gothic" pitchFamily="34" charset="-120"/>
               </a:rPr>
-              <a:t>통일된 주황/갈색 아이콘 세트(SVG)</a:t>
+              <a:t>공통확인 표를 메인 취합본에 통합</a:t>
             </a:r>
             <a:endParaRPr lang="en-US" sz="1300" dirty="0"/>
           </a:p>
@@ -4517,7 +5106,7 @@
                 <a:ea typeface="Malgun Gothic" pitchFamily="34" charset="-122"/>
                 <a:cs typeface="Malgun Gothic" pitchFamily="34" charset="-120"/>
               </a:rPr>
-              <a:t>캘린더 권한 대비 읽기 목록 폴백</a:t>
+              <a:t>통일된 주황/갈색 아이콘 세트(SVG)</a:t>
             </a:r>
             <a:endParaRPr lang="en-US" sz="1300" dirty="0"/>
           </a:p>
@@ -4556,7 +5145,7 @@
                 <a:ea typeface="Malgun Gothic" pitchFamily="34" charset="-122"/>
                 <a:cs typeface="Malgun Gothic" pitchFamily="34" charset="-120"/>
               </a:rPr>
-              <a:t>carerobot-weekly-report.streamlit.app</a:t>
+              <a:t>dolbom-studio.streamlit.app</a:t>
             </a:r>
             <a:pPr indent="0" marL="0">
               <a:buNone/>
@@ -4570,7 +5159,7 @@
                 <a:ea typeface="Malgun Gothic" pitchFamily="34" charset="-122"/>
                 <a:cs typeface="Malgun Gothic" pitchFamily="34" charset="-120"/>
               </a:rPr>
-              <a:t>   ·   비밀번호 carerobot (전원 공용)</a:t>
+              <a:t>   ·   개인 계정 로그인(회원가입 → 관리자 승인)</a:t>
             </a:r>
             <a:endParaRPr lang="en-US" sz="1400" dirty="0"/>
           </a:p>
@@ -4609,7 +5198,7 @@
                 <a:ea typeface="Malgun Gothic" pitchFamily="34" charset="-122"/>
                 <a:cs typeface="Malgun Gothic" pitchFamily="34" charset="-120"/>
               </a:rPr>
-              <a:t>dolbom studio</a:t>
+              <a:t>Dolbom Studio</a:t>
             </a:r>
             <a:endParaRPr lang="en-US" sz="1300" dirty="0"/>
           </a:p>
@@ -7200,7 +7789,7 @@
                 <a:ea typeface="Malgun Gothic" pitchFamily="34" charset="-122"/>
                 <a:cs typeface="Malgun Gothic" pitchFamily="34" charset="-120"/>
               </a:rPr>
-              <a:t>이름 1회 입력</a:t>
+              <a:t>개인 계정 로그인</a:t>
             </a:r>
             <a:endParaRPr lang="en-US" sz="3000" dirty="0"/>
           </a:p>
@@ -7239,7 +7828,7 @@
                 <a:ea typeface="Malgun Gothic" pitchFamily="34" charset="-122"/>
                 <a:cs typeface="Malgun Gothic" pitchFamily="34" charset="-120"/>
               </a:rPr>
-              <a:t>'나는 누구' 한 번 선택 → 모든 폼 자동</a:t>
+              <a:t>로그인=본인 → 모든 폼에 이름 자동 · 폰에서 앱처럼</a:t>
             </a:r>
             <a:endParaRPr lang="en-US" sz="1300" dirty="0"/>
           </a:p>
@@ -7441,8 +8030,8 @@
         </p:nvSpPr>
         <p:spPr>
           <a:xfrm>
-            <a:off x="1417320" y="3200400"/>
-            <a:ext cx="9326880" cy="0"/>
+            <a:off x="1320165" y="3200400"/>
+            <a:ext cx="9521190" cy="0"/>
           </a:xfrm>
           <a:prstGeom prst="line">
             <a:avLst/>
@@ -7464,7 +8053,7 @@
         </p:nvSpPr>
         <p:spPr>
           <a:xfrm>
-            <a:off x="1124712" y="2907792"/>
+            <a:off x="1027557" y="2907792"/>
             <a:ext cx="585216" cy="585216"/>
           </a:xfrm>
           <a:prstGeom prst="ellipse">
@@ -7489,7 +8078,7 @@
         </p:nvSpPr>
         <p:spPr>
           <a:xfrm>
-            <a:off x="1124712" y="2907792"/>
+            <a:off x="1027557" y="2907792"/>
             <a:ext cx="585216" cy="585216"/>
           </a:xfrm>
           <a:prstGeom prst="rect">
@@ -7529,7 +8118,7 @@
         <p:spPr>
           <a:xfrm>
             <a:off x="731520" y="3657600"/>
-            <a:ext cx="1371600" cy="640080"/>
+            <a:ext cx="1177290" cy="640080"/>
           </a:xfrm>
           <a:prstGeom prst="rect">
             <a:avLst/>
@@ -7568,7 +8157,7 @@
         <p:spPr>
           <a:xfrm>
             <a:off x="731520" y="2468880"/>
-            <a:ext cx="1371600" cy="320040"/>
+            <a:ext cx="1177290" cy="320040"/>
           </a:xfrm>
           <a:prstGeom prst="rect">
             <a:avLst/>
@@ -7606,7 +8195,7 @@
         </p:nvSpPr>
         <p:spPr>
           <a:xfrm>
-            <a:off x="2679192" y="2907792"/>
+            <a:off x="2387727" y="2907792"/>
             <a:ext cx="585216" cy="585216"/>
           </a:xfrm>
           <a:prstGeom prst="ellipse">
@@ -7631,7 +8220,7 @@
         </p:nvSpPr>
         <p:spPr>
           <a:xfrm>
-            <a:off x="2679192" y="2907792"/>
+            <a:off x="2387727" y="2907792"/>
             <a:ext cx="585216" cy="585216"/>
           </a:xfrm>
           <a:prstGeom prst="rect">
@@ -7670,8 +8259,8 @@
         </p:nvSpPr>
         <p:spPr>
           <a:xfrm>
-            <a:off x="2286000" y="3657600"/>
-            <a:ext cx="1371600" cy="640080"/>
+            <a:off x="2091690" y="3657600"/>
+            <a:ext cx="1177290" cy="640080"/>
           </a:xfrm>
           <a:prstGeom prst="rect">
             <a:avLst/>
@@ -7709,8 +8298,8 @@
         </p:nvSpPr>
         <p:spPr>
           <a:xfrm>
-            <a:off x="2286000" y="2468880"/>
-            <a:ext cx="1371600" cy="320040"/>
+            <a:off x="2091690" y="2468880"/>
+            <a:ext cx="1177290" cy="320040"/>
           </a:xfrm>
           <a:prstGeom prst="rect">
             <a:avLst/>
@@ -7748,7 +8337,7 @@
         </p:nvSpPr>
         <p:spPr>
           <a:xfrm>
-            <a:off x="4233672" y="2907792"/>
+            <a:off x="3747897" y="2907792"/>
             <a:ext cx="585216" cy="585216"/>
           </a:xfrm>
           <a:prstGeom prst="ellipse">
@@ -7773,7 +8362,7 @@
         </p:nvSpPr>
         <p:spPr>
           <a:xfrm>
-            <a:off x="4233672" y="2907792"/>
+            <a:off x="3747897" y="2907792"/>
             <a:ext cx="585216" cy="585216"/>
           </a:xfrm>
           <a:prstGeom prst="rect">
@@ -7812,8 +8401,8 @@
         </p:nvSpPr>
         <p:spPr>
           <a:xfrm>
-            <a:off x="3840480" y="3657600"/>
-            <a:ext cx="1371600" cy="640080"/>
+            <a:off x="3451860" y="3657600"/>
+            <a:ext cx="1177290" cy="640080"/>
           </a:xfrm>
           <a:prstGeom prst="rect">
             <a:avLst/>
@@ -7851,8 +8440,8 @@
         </p:nvSpPr>
         <p:spPr>
           <a:xfrm>
-            <a:off x="3840480" y="2468880"/>
-            <a:ext cx="1371600" cy="320040"/>
+            <a:off x="3451860" y="2468880"/>
+            <a:ext cx="1177290" cy="320040"/>
           </a:xfrm>
           <a:prstGeom prst="rect">
             <a:avLst/>
@@ -7890,7 +8479,7 @@
         </p:nvSpPr>
         <p:spPr>
           <a:xfrm>
-            <a:off x="5788152" y="2907792"/>
+            <a:off x="5108067" y="2907792"/>
             <a:ext cx="585216" cy="585216"/>
           </a:xfrm>
           <a:prstGeom prst="ellipse">
@@ -7915,7 +8504,7 @@
         </p:nvSpPr>
         <p:spPr>
           <a:xfrm>
-            <a:off x="5788152" y="2907792"/>
+            <a:off x="5108067" y="2907792"/>
             <a:ext cx="585216" cy="585216"/>
           </a:xfrm>
           <a:prstGeom prst="rect">
@@ -7954,8 +8543,8 @@
         </p:nvSpPr>
         <p:spPr>
           <a:xfrm>
-            <a:off x="5394960" y="3657600"/>
-            <a:ext cx="1371600" cy="640080"/>
+            <a:off x="4812030" y="3657600"/>
+            <a:ext cx="1177290" cy="640080"/>
           </a:xfrm>
           <a:prstGeom prst="rect">
             <a:avLst/>
@@ -7993,8 +8582,8 @@
         </p:nvSpPr>
         <p:spPr>
           <a:xfrm>
-            <a:off x="5394960" y="2468880"/>
-            <a:ext cx="1371600" cy="320040"/>
+            <a:off x="4812030" y="2468880"/>
+            <a:ext cx="1177290" cy="320040"/>
           </a:xfrm>
           <a:prstGeom prst="rect">
             <a:avLst/>
@@ -8032,7 +8621,7 @@
         </p:nvSpPr>
         <p:spPr>
           <a:xfrm>
-            <a:off x="7342632" y="2907792"/>
+            <a:off x="6468237" y="2907792"/>
             <a:ext cx="585216" cy="585216"/>
           </a:xfrm>
           <a:prstGeom prst="ellipse">
@@ -8057,7 +8646,7 @@
         </p:nvSpPr>
         <p:spPr>
           <a:xfrm>
-            <a:off x="7342632" y="2907792"/>
+            <a:off x="6468237" y="2907792"/>
             <a:ext cx="585216" cy="585216"/>
           </a:xfrm>
           <a:prstGeom prst="rect">
@@ -8096,8 +8685,8 @@
         </p:nvSpPr>
         <p:spPr>
           <a:xfrm>
-            <a:off x="6949440" y="3657600"/>
-            <a:ext cx="1371600" cy="640080"/>
+            <a:off x="6172200" y="3657600"/>
+            <a:ext cx="1177290" cy="640080"/>
           </a:xfrm>
           <a:prstGeom prst="rect">
             <a:avLst/>
@@ -8135,8 +8724,8 @@
         </p:nvSpPr>
         <p:spPr>
           <a:xfrm>
-            <a:off x="6949440" y="2468880"/>
-            <a:ext cx="1371600" cy="320040"/>
+            <a:off x="6172200" y="2468880"/>
+            <a:ext cx="1177290" cy="320040"/>
           </a:xfrm>
           <a:prstGeom prst="rect">
             <a:avLst/>
@@ -8174,7 +8763,7 @@
         </p:nvSpPr>
         <p:spPr>
           <a:xfrm>
-            <a:off x="8897112" y="2907792"/>
+            <a:off x="7828407" y="2907792"/>
             <a:ext cx="585216" cy="585216"/>
           </a:xfrm>
           <a:prstGeom prst="ellipse">
@@ -8199,7 +8788,7 @@
         </p:nvSpPr>
         <p:spPr>
           <a:xfrm>
-            <a:off x="8897112" y="2907792"/>
+            <a:off x="7828407" y="2907792"/>
             <a:ext cx="585216" cy="585216"/>
           </a:xfrm>
           <a:prstGeom prst="rect">
@@ -8238,8 +8827,8 @@
         </p:nvSpPr>
         <p:spPr>
           <a:xfrm>
-            <a:off x="8503920" y="3657600"/>
-            <a:ext cx="1371600" cy="640080"/>
+            <a:off x="7532370" y="3657600"/>
+            <a:ext cx="1177290" cy="640080"/>
           </a:xfrm>
           <a:prstGeom prst="rect">
             <a:avLst/>
@@ -8277,8 +8866,8 @@
         </p:nvSpPr>
         <p:spPr>
           <a:xfrm>
-            <a:off x="8503920" y="2468880"/>
-            <a:ext cx="1371600" cy="320040"/>
+            <a:off x="7532370" y="2468880"/>
+            <a:ext cx="1177290" cy="320040"/>
           </a:xfrm>
           <a:prstGeom prst="rect">
             <a:avLst/>
@@ -8316,7 +8905,7 @@
         </p:nvSpPr>
         <p:spPr>
           <a:xfrm>
-            <a:off x="10451592" y="2907792"/>
+            <a:off x="9188577" y="2907792"/>
             <a:ext cx="585216" cy="585216"/>
           </a:xfrm>
           <a:prstGeom prst="ellipse">
@@ -8341,7 +8930,7 @@
         </p:nvSpPr>
         <p:spPr>
           <a:xfrm>
-            <a:off x="10451592" y="2907792"/>
+            <a:off x="9188577" y="2907792"/>
             <a:ext cx="585216" cy="585216"/>
           </a:xfrm>
           <a:prstGeom prst="rect">
@@ -8380,8 +8969,8 @@
         </p:nvSpPr>
         <p:spPr>
           <a:xfrm>
-            <a:off x="10058400" y="3657600"/>
-            <a:ext cx="1371600" cy="640080"/>
+            <a:off x="8892540" y="3657600"/>
+            <a:ext cx="1177290" cy="640080"/>
           </a:xfrm>
           <a:prstGeom prst="rect">
             <a:avLst/>
@@ -8419,8 +9008,8 @@
         </p:nvSpPr>
         <p:spPr>
           <a:xfrm>
-            <a:off x="10058400" y="2468880"/>
-            <a:ext cx="1371600" cy="320040"/>
+            <a:off x="8892540" y="2468880"/>
+            <a:ext cx="1177290" cy="320040"/>
           </a:xfrm>
           <a:prstGeom prst="rect">
             <a:avLst/>
@@ -8452,7 +9041,149 @@
       </p:sp>
       <p:sp>
         <p:nvSpPr>
-          <p:cNvPr id="34" name="Text 32"/>
+          <p:cNvPr id="34" name="Shape 32"/>
+          <p:cNvSpPr/>
+          <p:nvPr/>
+        </p:nvSpPr>
+        <p:spPr>
+          <a:xfrm>
+            <a:off x="10548747" y="2907792"/>
+            <a:ext cx="585216" cy="585216"/>
+          </a:xfrm>
+          <a:prstGeom prst="ellipse">
+            <a:avLst/>
+          </a:prstGeom>
+          <a:solidFill>
+            <a:srgbClr val="C4622D"/>
+          </a:solidFill>
+          <a:ln w="19050">
+            <a:solidFill>
+              <a:srgbClr val="F4EBE1"/>
+            </a:solidFill>
+            <a:prstDash val="solid"/>
+          </a:ln>
+        </p:spPr>
+      </p:sp>
+      <p:sp>
+        <p:nvSpPr>
+          <p:cNvPr id="35" name="Text 33"/>
+          <p:cNvSpPr/>
+          <p:nvPr/>
+        </p:nvSpPr>
+        <p:spPr>
+          <a:xfrm>
+            <a:off x="10548747" y="2907792"/>
+            <a:ext cx="585216" cy="585216"/>
+          </a:xfrm>
+          <a:prstGeom prst="rect">
+            <a:avLst/>
+          </a:prstGeom>
+          <a:noFill/>
+          <a:ln/>
+        </p:spPr>
+        <p:txBody>
+          <a:bodyPr wrap="square" lIns="0" tIns="0" rIns="0" bIns="0" rtlCol="0" anchor="ctr"/>
+          <a:lstStyle/>
+          <a:p>
+            <a:pPr algn="ctr" indent="0" marL="0">
+              <a:buNone/>
+            </a:pPr>
+            <a:r>
+              <a:rPr lang="en-US" sz="1800" b="1" dirty="0">
+                <a:solidFill>
+                  <a:srgbClr val="FFFFFF"/>
+                </a:solidFill>
+                <a:latin typeface="Malgun Gothic" pitchFamily="34" charset="0"/>
+                <a:ea typeface="Malgun Gothic" pitchFamily="34" charset="-122"/>
+                <a:cs typeface="Malgun Gothic" pitchFamily="34" charset="-120"/>
+              </a:rPr>
+              <a:t>8</a:t>
+            </a:r>
+            <a:endParaRPr lang="en-US" sz="1800" dirty="0"/>
+          </a:p>
+        </p:txBody>
+      </p:sp>
+      <p:sp>
+        <p:nvSpPr>
+          <p:cNvPr id="36" name="Text 34"/>
+          <p:cNvSpPr/>
+          <p:nvPr/>
+        </p:nvSpPr>
+        <p:spPr>
+          <a:xfrm>
+            <a:off x="10252710" y="3657600"/>
+            <a:ext cx="1177290" cy="640080"/>
+          </a:xfrm>
+          <a:prstGeom prst="rect">
+            <a:avLst/>
+          </a:prstGeom>
+          <a:noFill/>
+          <a:ln/>
+        </p:spPr>
+        <p:txBody>
+          <a:bodyPr wrap="square" lIns="0" tIns="0" rIns="0" bIns="0" rtlCol="0" anchor="t"/>
+          <a:lstStyle/>
+          <a:p>
+            <a:pPr algn="ctr" indent="0" marL="0">
+              <a:buNone/>
+            </a:pPr>
+            <a:r>
+              <a:rPr lang="en-US" sz="1250" b="1" dirty="0">
+                <a:solidFill>
+                  <a:srgbClr val="F4EBE1"/>
+                </a:solidFill>
+                <a:latin typeface="Malgun Gothic" pitchFamily="34" charset="0"/>
+                <a:ea typeface="Malgun Gothic" pitchFamily="34" charset="-122"/>
+                <a:cs typeface="Malgun Gothic" pitchFamily="34" charset="-120"/>
+              </a:rPr>
+              <a:t>계정·모바일</a:t>
+            </a:r>
+            <a:endParaRPr lang="en-US" sz="1250" dirty="0"/>
+          </a:p>
+        </p:txBody>
+      </p:sp>
+      <p:sp>
+        <p:nvSpPr>
+          <p:cNvPr id="37" name="Text 35"/>
+          <p:cNvSpPr/>
+          <p:nvPr/>
+        </p:nvSpPr>
+        <p:spPr>
+          <a:xfrm>
+            <a:off x="10252710" y="2468880"/>
+            <a:ext cx="1177290" cy="320040"/>
+          </a:xfrm>
+          <a:prstGeom prst="rect">
+            <a:avLst/>
+          </a:prstGeom>
+          <a:noFill/>
+          <a:ln/>
+        </p:spPr>
+        <p:txBody>
+          <a:bodyPr wrap="square" lIns="0" tIns="0" rIns="0" bIns="0" rtlCol="0" anchor="ctr"/>
+          <a:lstStyle/>
+          <a:p>
+            <a:pPr algn="ctr" indent="0" marL="0">
+              <a:buNone/>
+            </a:pPr>
+            <a:r>
+              <a:rPr lang="en-US" sz="1100" dirty="0">
+                <a:solidFill>
+                  <a:srgbClr val="E08A3C"/>
+                </a:solidFill>
+                <a:latin typeface="Malgun Gothic" pitchFamily="34" charset="0"/>
+                <a:ea typeface="Malgun Gothic" pitchFamily="34" charset="-122"/>
+                <a:cs typeface="Malgun Gothic" pitchFamily="34" charset="-120"/>
+              </a:rPr>
+              <a:t>07.09</a:t>
+            </a:r>
+            <a:endParaRPr lang="en-US" sz="1100" dirty="0"/>
+          </a:p>
+        </p:txBody>
+      </p:sp>
+      <p:sp>
+        <p:nvSpPr>
+          <p:cNvPr id="38" name="Text 36"/>
           <p:cNvSpPr/>
           <p:nvPr/>
         </p:nvSpPr>

--- a/docs/dolbom_studio_소개.pptx
+++ b/docs/dolbom_studio_소개.pptx
@@ -19,9 +19,11 @@
     <p:sldId id="267" r:id="rId13"/>
     <p:sldId id="268" r:id="rId14"/>
     <p:sldId id="269" r:id="rId15"/>
+    <p:sldId id="270" r:id="rId16"/>
+    <p:sldId id="271" r:id="rId17"/>
   </p:sldIdLst>
   <p:notesMasterIdLst>
-    <p:notesMasterId r:id="rId16"/>
+    <p:notesMasterId r:id="rId18"/>
   </p:notesMasterIdLst>
   <p:sldSz cx="12161520" cy="6858000"/>
   <p:notesSz cx="6858000" cy="12161520"/>
@@ -955,7 +957,7 @@
           <a:p>
             <a:r>
               <a:rPr lang="en-US" dirty="0"/>
-              <a:t>마무리: 효과 요약과 향후 과제. 계속 개선 중.</a:t>
+              <a:t>폰 안정화 · 자동 로그인 삽질기 — 실패·되돌리기도 과정. '실패해도 앱은 정상' 폴백 원칙을 세운 단계.</a:t>
             </a:r>
             <a:endParaRPr lang="en-US" dirty="0"/>
           </a:p>
@@ -979,6 +981,182 @@
             <a:fld id="{F7021451-1387-4CA6-816F-3879F97B5CBC}" type="slidenum">
               <a:rPr lang="en-US"/>
               <a:t>14</a:t>
+            </a:fld>
+            <a:endParaRPr lang="en-US"/>
+          </a:p>
+        </p:txBody>
+      </p:sp>
+    </p:spTree>
+    <p:extLst>
+      <p:ext uri="{BB962C8B-B14F-4D97-AF65-F5344CB8AC3E}">
+        <p14:creationId xmlns:p14="http://schemas.microsoft.com/office/powerpoint/2010/main" val="1024086991"/>
+      </p:ext>
+    </p:extLst>
+  </p:cSld>
+  <p:clrMapOvr>
+    <a:masterClrMapping/>
+  </p:clrMapOvr>
+</p:notes>
+</file>
+
+<file path=ppt/notesSlides/notesSlide15.xml><?xml version="1.0" encoding="utf-8"?>
+<p:notes xmlns:a="http://schemas.openxmlformats.org/drawingml/2006/main" xmlns:r="http://schemas.openxmlformats.org/officeDocument/2006/relationships" xmlns:p="http://schemas.openxmlformats.org/presentationml/2006/main">
+  <p:cSld>
+    <p:spTree>
+      <p:nvGrpSpPr>
+        <p:cNvPr id="1" name=""/>
+        <p:cNvGrpSpPr/>
+        <p:nvPr/>
+      </p:nvGrpSpPr>
+      <p:grpSpPr>
+        <a:xfrm>
+          <a:off x="0" y="0"/>
+          <a:ext cx="0" cy="0"/>
+          <a:chOff x="0" y="0"/>
+          <a:chExt cx="0" cy="0"/>
+        </a:xfrm>
+      </p:grpSpPr>
+      <p:sp>
+        <p:nvSpPr>
+          <p:cNvPr id="2" name="Slide Image Placeholder 1"/>
+          <p:cNvSpPr>
+            <a:spLocks noGrp="1" noRot="1" noChangeAspect="1"/>
+          </p:cNvSpPr>
+          <p:nvPr>
+            <p:ph type="sldImg"/>
+          </p:nvPr>
+        </p:nvSpPr>
+        <p:spPr/>
+      </p:sp>
+      <p:sp>
+        <p:nvSpPr>
+          <p:cNvPr id="3" name="Notes Placeholder 2"/>
+          <p:cNvSpPr>
+            <a:spLocks noGrp="1"/>
+          </p:cNvSpPr>
+          <p:nvPr>
+            <p:ph type="body" idx="1"/>
+          </p:nvPr>
+        </p:nvSpPr>
+        <p:spPr/>
+        <p:txBody>
+          <a:bodyPr/>
+          <a:lstStyle/>
+          <a:p>
+            <a:r>
+              <a:rPr lang="en-US" dirty="0"/>
+              <a:t>홈 개인화 · 일정 지능화 — 각자 쓰기 좋게 개인화하고, 놓치는 정보(장소·계획)를 앱이 챙겨주게.</a:t>
+            </a:r>
+            <a:endParaRPr lang="en-US" dirty="0"/>
+          </a:p>
+        </p:txBody>
+      </p:sp>
+      <p:sp>
+        <p:nvSpPr>
+          <p:cNvPr id="4" name="Slide Number Placeholder 3"/>
+          <p:cNvSpPr>
+            <a:spLocks noGrp="1"/>
+          </p:cNvSpPr>
+          <p:nvPr>
+            <p:ph type="sldNum" sz="quarter" idx="10"/>
+          </p:nvPr>
+        </p:nvSpPr>
+        <p:spPr/>
+        <p:txBody>
+          <a:bodyPr/>
+          <a:lstStyle/>
+          <a:p>
+            <a:fld id="{F7021451-1387-4CA6-816F-3879F97B5CBC}" type="slidenum">
+              <a:rPr lang="en-US"/>
+              <a:t>15</a:t>
+            </a:fld>
+            <a:endParaRPr lang="en-US"/>
+          </a:p>
+        </p:txBody>
+      </p:sp>
+    </p:spTree>
+    <p:extLst>
+      <p:ext uri="{BB962C8B-B14F-4D97-AF65-F5344CB8AC3E}">
+        <p14:creationId xmlns:p14="http://schemas.microsoft.com/office/powerpoint/2010/main" val="1024086991"/>
+      </p:ext>
+    </p:extLst>
+  </p:cSld>
+  <p:clrMapOvr>
+    <a:masterClrMapping/>
+  </p:clrMapOvr>
+</p:notes>
+</file>
+
+<file path=ppt/notesSlides/notesSlide16.xml><?xml version="1.0" encoding="utf-8"?>
+<p:notes xmlns:a="http://schemas.openxmlformats.org/drawingml/2006/main" xmlns:r="http://schemas.openxmlformats.org/officeDocument/2006/relationships" xmlns:p="http://schemas.openxmlformats.org/presentationml/2006/main">
+  <p:cSld>
+    <p:spTree>
+      <p:nvGrpSpPr>
+        <p:cNvPr id="1" name=""/>
+        <p:cNvGrpSpPr/>
+        <p:nvPr/>
+      </p:nvGrpSpPr>
+      <p:grpSpPr>
+        <a:xfrm>
+          <a:off x="0" y="0"/>
+          <a:ext cx="0" cy="0"/>
+          <a:chOff x="0" y="0"/>
+          <a:chExt cx="0" cy="0"/>
+        </a:xfrm>
+      </p:grpSpPr>
+      <p:sp>
+        <p:nvSpPr>
+          <p:cNvPr id="2" name="Slide Image Placeholder 1"/>
+          <p:cNvSpPr>
+            <a:spLocks noGrp="1" noRot="1" noChangeAspect="1"/>
+          </p:cNvSpPr>
+          <p:nvPr>
+            <p:ph type="sldImg"/>
+          </p:nvPr>
+        </p:nvSpPr>
+        <p:spPr/>
+      </p:sp>
+      <p:sp>
+        <p:nvSpPr>
+          <p:cNvPr id="3" name="Notes Placeholder 2"/>
+          <p:cNvSpPr>
+            <a:spLocks noGrp="1"/>
+          </p:cNvSpPr>
+          <p:nvPr>
+            <p:ph type="body" idx="1"/>
+          </p:nvPr>
+        </p:nvSpPr>
+        <p:spPr/>
+        <p:txBody>
+          <a:bodyPr/>
+          <a:lstStyle/>
+          <a:p>
+            <a:r>
+              <a:rPr lang="en-US" dirty="0"/>
+              <a:t>마무리: 효과 요약과 향후 과제. 계속 개선 중.</a:t>
+            </a:r>
+            <a:endParaRPr lang="en-US" dirty="0"/>
+          </a:p>
+        </p:txBody>
+      </p:sp>
+      <p:sp>
+        <p:nvSpPr>
+          <p:cNvPr id="4" name="Slide Number Placeholder 3"/>
+          <p:cNvSpPr>
+            <a:spLocks noGrp="1"/>
+          </p:cNvSpPr>
+          <p:nvPr>
+            <p:ph type="sldNum" sz="quarter" idx="10"/>
+          </p:nvPr>
+        </p:nvSpPr>
+        <p:spPr/>
+        <p:txBody>
+          <a:bodyPr/>
+          <a:lstStyle/>
+          <a:p>
+            <a:fld id="{F7021451-1387-4CA6-816F-3879F97B5CBC}" type="slidenum">
+              <a:rPr lang="en-US"/>
+              <a:t>16</a:t>
             </a:fld>
             <a:endParaRPr lang="en-US"/>
           </a:p>
@@ -4651,6 +4829,1006 @@
     <p:bg>
       <p:bgPr>
         <a:solidFill>
+          <a:srgbClr val="FFFFFF"/>
+        </a:solidFill>
+      </p:bgPr>
+    </p:bg>
+    <p:spTree>
+      <p:nvGrpSpPr>
+        <p:cNvPr id="1" name=""/>
+        <p:cNvGrpSpPr/>
+        <p:nvPr/>
+      </p:nvGrpSpPr>
+      <p:grpSpPr>
+        <a:xfrm>
+          <a:off x="0" y="0"/>
+          <a:ext cx="0" cy="0"/>
+          <a:chOff x="0" y="0"/>
+          <a:chExt cx="0" cy="0"/>
+        </a:xfrm>
+      </p:grpSpPr>
+      <p:sp>
+        <p:nvSpPr>
+          <p:cNvPr id="2" name="Shape 0"/>
+          <p:cNvSpPr/>
+          <p:nvPr/>
+        </p:nvSpPr>
+        <p:spPr>
+          <a:xfrm>
+            <a:off x="640080" y="566928"/>
+            <a:ext cx="658368" cy="658368"/>
+          </a:xfrm>
+          <a:prstGeom prst="ellipse">
+            <a:avLst/>
+          </a:prstGeom>
+          <a:solidFill>
+            <a:srgbClr val="C4622D"/>
+          </a:solidFill>
+          <a:ln/>
+        </p:spPr>
+      </p:sp>
+      <p:sp>
+        <p:nvSpPr>
+          <p:cNvPr id="3" name="Text 1"/>
+          <p:cNvSpPr/>
+          <p:nvPr/>
+        </p:nvSpPr>
+        <p:spPr>
+          <a:xfrm>
+            <a:off x="640080" y="566928"/>
+            <a:ext cx="658368" cy="658368"/>
+          </a:xfrm>
+          <a:prstGeom prst="rect">
+            <a:avLst/>
+          </a:prstGeom>
+          <a:noFill/>
+          <a:ln/>
+        </p:spPr>
+        <p:txBody>
+          <a:bodyPr wrap="square" lIns="0" tIns="0" rIns="0" bIns="0" rtlCol="0" anchor="ctr"/>
+          <a:lstStyle/>
+          <a:p>
+            <a:pPr algn="ctr" indent="0" marL="0">
+              <a:buNone/>
+            </a:pPr>
+            <a:r>
+              <a:rPr lang="en-US" sz="2600" b="1" dirty="0">
+                <a:solidFill>
+                  <a:srgbClr val="FFFFFF"/>
+                </a:solidFill>
+                <a:latin typeface="Malgun Gothic" pitchFamily="34" charset="0"/>
+                <a:ea typeface="Malgun Gothic" pitchFamily="34" charset="-122"/>
+                <a:cs typeface="Malgun Gothic" pitchFamily="34" charset="-120"/>
+              </a:rPr>
+              <a:t>9</a:t>
+            </a:r>
+            <a:endParaRPr lang="en-US" sz="2600" dirty="0"/>
+          </a:p>
+        </p:txBody>
+      </p:sp>
+      <p:sp>
+        <p:nvSpPr>
+          <p:cNvPr id="4" name="Text 2"/>
+          <p:cNvSpPr/>
+          <p:nvPr/>
+        </p:nvSpPr>
+        <p:spPr>
+          <a:xfrm>
+            <a:off x="1508760" y="530352"/>
+            <a:ext cx="7315200" cy="274320"/>
+          </a:xfrm>
+          <a:prstGeom prst="rect">
+            <a:avLst/>
+          </a:prstGeom>
+          <a:noFill/>
+          <a:ln/>
+        </p:spPr>
+        <p:txBody>
+          <a:bodyPr wrap="square" lIns="0" tIns="0" rIns="0" bIns="0" rtlCol="0" anchor="ctr"/>
+          <a:lstStyle/>
+          <a:p>
+            <a:pPr indent="0" marL="0">
+              <a:buNone/>
+            </a:pPr>
+            <a:r>
+              <a:rPr lang="en-US" sz="1150" b="1" spc="100" kern="0" dirty="0">
+                <a:solidFill>
+                  <a:srgbClr val="8A7A6B"/>
+                </a:solidFill>
+                <a:latin typeface="Malgun Gothic" pitchFamily="34" charset="0"/>
+                <a:ea typeface="Malgun Gothic" pitchFamily="34" charset="-122"/>
+                <a:cs typeface="Malgun Gothic" pitchFamily="34" charset="-120"/>
+              </a:rPr>
+              <a:t>STAGE 9 · 2026.07.09</a:t>
+            </a:r>
+            <a:endParaRPr lang="en-US" sz="1150" dirty="0"/>
+          </a:p>
+        </p:txBody>
+      </p:sp>
+      <p:sp>
+        <p:nvSpPr>
+          <p:cNvPr id="5" name="Text 3"/>
+          <p:cNvSpPr/>
+          <p:nvPr/>
+        </p:nvSpPr>
+        <p:spPr>
+          <a:xfrm>
+            <a:off x="1508760" y="786384"/>
+            <a:ext cx="9555480" cy="548640"/>
+          </a:xfrm>
+          <a:prstGeom prst="rect">
+            <a:avLst/>
+          </a:prstGeom>
+          <a:noFill/>
+          <a:ln/>
+        </p:spPr>
+        <p:txBody>
+          <a:bodyPr wrap="square" lIns="0" tIns="0" rIns="0" bIns="0" rtlCol="0" anchor="ctr"/>
+          <a:lstStyle/>
+          <a:p>
+            <a:pPr indent="0" marL="0">
+              <a:buNone/>
+            </a:pPr>
+            <a:r>
+              <a:rPr lang="en-US" sz="2500" b="1" dirty="0">
+                <a:solidFill>
+                  <a:srgbClr val="5A3A24"/>
+                </a:solidFill>
+                <a:latin typeface="Malgun Gothic" pitchFamily="34" charset="0"/>
+                <a:ea typeface="Malgun Gothic" pitchFamily="34" charset="-122"/>
+                <a:cs typeface="Malgun Gothic" pitchFamily="34" charset="-120"/>
+              </a:rPr>
+              <a:t>폰 안정화 · 자동 로그인 삽질기</a:t>
+            </a:r>
+            <a:endParaRPr lang="en-US" sz="2500" dirty="0"/>
+          </a:p>
+        </p:txBody>
+      </p:sp>
+      <p:sp>
+        <p:nvSpPr>
+          <p:cNvPr id="6" name="Text 4"/>
+          <p:cNvSpPr/>
+          <p:nvPr/>
+        </p:nvSpPr>
+        <p:spPr>
+          <a:xfrm>
+            <a:off x="640080" y="1691640"/>
+            <a:ext cx="4663440" cy="320040"/>
+          </a:xfrm>
+          <a:prstGeom prst="rect">
+            <a:avLst/>
+          </a:prstGeom>
+          <a:noFill/>
+          <a:ln/>
+        </p:spPr>
+        <p:txBody>
+          <a:bodyPr wrap="square" lIns="0" tIns="0" rIns="0" bIns="0" rtlCol="0" anchor="ctr"/>
+          <a:lstStyle/>
+          <a:p>
+            <a:pPr indent="0" marL="0">
+              <a:buNone/>
+            </a:pPr>
+            <a:r>
+              <a:rPr lang="en-US" sz="1400" b="1" dirty="0">
+                <a:solidFill>
+                  <a:srgbClr val="C4622D"/>
+                </a:solidFill>
+                <a:latin typeface="Malgun Gothic" pitchFamily="34" charset="0"/>
+                <a:ea typeface="Malgun Gothic" pitchFamily="34" charset="-122"/>
+                <a:cs typeface="Malgun Gothic" pitchFamily="34" charset="-120"/>
+              </a:rPr>
+              <a:t>무엇을 바꿨나</a:t>
+            </a:r>
+            <a:endParaRPr lang="en-US" sz="1400" dirty="0"/>
+          </a:p>
+        </p:txBody>
+      </p:sp>
+      <p:sp>
+        <p:nvSpPr>
+          <p:cNvPr id="7" name="Text 5"/>
+          <p:cNvSpPr/>
+          <p:nvPr/>
+        </p:nvSpPr>
+        <p:spPr>
+          <a:xfrm>
+            <a:off x="640080" y="2057400"/>
+            <a:ext cx="4663440" cy="2377440"/>
+          </a:xfrm>
+          <a:prstGeom prst="rect">
+            <a:avLst/>
+          </a:prstGeom>
+          <a:noFill/>
+          <a:ln/>
+        </p:spPr>
+        <p:txBody>
+          <a:bodyPr wrap="square" rtlCol="0" anchor="t"/>
+          <a:lstStyle/>
+          <a:p>
+            <a:pPr marL="177800" indent="-177800">
+              <a:spcAft>
+                <a:spcPts val="600"/>
+              </a:spcAft>
+              <a:buSzPct val="100000"/>
+              <a:buChar char="•"/>
+            </a:pPr>
+            <a:r>
+              <a:rPr lang="en-US" sz="1300" dirty="0">
+                <a:solidFill>
+                  <a:srgbClr val="33291F"/>
+                </a:solidFill>
+                <a:latin typeface="Malgun Gothic" pitchFamily="34" charset="0"/>
+                <a:ea typeface="Malgun Gothic" pitchFamily="34" charset="-122"/>
+                <a:cs typeface="Malgun Gothic" pitchFamily="34" charset="-120"/>
+              </a:rPr>
+              <a:t>폰 문제: iOS Safari 자동로그인 실패 · 달력 구글 로그인 벽</a:t>
+            </a:r>
+            <a:endParaRPr lang="en-US" sz="1300" dirty="0"/>
+          </a:p>
+          <a:p>
+            <a:pPr marL="177800" indent="-177800">
+              <a:spcAft>
+                <a:spcPts val="600"/>
+              </a:spcAft>
+              <a:buSzPct val="100000"/>
+              <a:buChar char="•"/>
+            </a:pPr>
+            <a:r>
+              <a:rPr lang="en-US" sz="1300" dirty="0">
+                <a:solidFill>
+                  <a:srgbClr val="33291F"/>
+                </a:solidFill>
+                <a:latin typeface="Malgun Gothic" pitchFamily="34" charset="0"/>
+                <a:ea typeface="Malgun Gothic" pitchFamily="34" charset="-122"/>
+                <a:cs typeface="Malgun Gothic" pitchFamily="34" charset="-120"/>
+              </a:rPr>
+              <a:t>자동로그인: window.parent.localStorage → 앱 크래시 → revert → streamlit-js-eval(안 멈춤)</a:t>
+            </a:r>
+            <a:endParaRPr lang="en-US" sz="1300" dirty="0"/>
+          </a:p>
+          <a:p>
+            <a:pPr marL="177800" indent="-177800">
+              <a:spcAft>
+                <a:spcPts val="600"/>
+              </a:spcAft>
+              <a:buSzPct val="100000"/>
+              <a:buChar char="•"/>
+            </a:pPr>
+            <a:r>
+              <a:rPr lang="en-US" sz="1300" dirty="0">
+                <a:solidFill>
+                  <a:srgbClr val="33291F"/>
+                </a:solidFill>
+                <a:latin typeface="Malgun Gothic" pitchFamily="34" charset="0"/>
+                <a:ea typeface="Malgun Gothic" pitchFamily="34" charset="-122"/>
+                <a:cs typeface="Malgun Gothic" pitchFamily="34" charset="-120"/>
+              </a:rPr>
+              <a:t>달력은 '캘린더 공개 설정 + 임베드 유지'로 해결</a:t>
+            </a:r>
+            <a:endParaRPr lang="en-US" sz="1300" dirty="0"/>
+          </a:p>
+        </p:txBody>
+      </p:sp>
+      <p:sp>
+        <p:nvSpPr>
+          <p:cNvPr id="8" name="Shape 6"/>
+          <p:cNvSpPr/>
+          <p:nvPr/>
+        </p:nvSpPr>
+        <p:spPr>
+          <a:xfrm>
+            <a:off x="640080" y="4709160"/>
+            <a:ext cx="4663440" cy="1600200"/>
+          </a:xfrm>
+          <a:prstGeom prst="roundRect">
+            <a:avLst>
+              <a:gd name="adj" fmla="val 5143"/>
+            </a:avLst>
+          </a:prstGeom>
+          <a:solidFill>
+            <a:srgbClr val="F7F0E8"/>
+          </a:solidFill>
+          <a:ln w="12700">
+            <a:solidFill>
+              <a:srgbClr val="E4D5C4"/>
+            </a:solidFill>
+            <a:prstDash val="solid"/>
+          </a:ln>
+        </p:spPr>
+      </p:sp>
+      <p:sp>
+        <p:nvSpPr>
+          <p:cNvPr id="9" name="Text 7"/>
+          <p:cNvSpPr/>
+          <p:nvPr/>
+        </p:nvSpPr>
+        <p:spPr>
+          <a:xfrm>
+            <a:off x="868680" y="4846320"/>
+            <a:ext cx="4206240" cy="320040"/>
+          </a:xfrm>
+          <a:prstGeom prst="rect">
+            <a:avLst/>
+          </a:prstGeom>
+          <a:noFill/>
+          <a:ln/>
+        </p:spPr>
+        <p:txBody>
+          <a:bodyPr wrap="square" lIns="0" tIns="0" rIns="0" bIns="0" rtlCol="0" anchor="ctr"/>
+          <a:lstStyle/>
+          <a:p>
+            <a:pPr indent="0" marL="0">
+              <a:buNone/>
+            </a:pPr>
+            <a:r>
+              <a:rPr lang="en-US" sz="1300" b="1" dirty="0">
+                <a:solidFill>
+                  <a:srgbClr val="C4622D"/>
+                </a:solidFill>
+                <a:latin typeface="Malgun Gothic" pitchFamily="34" charset="0"/>
+                <a:ea typeface="Malgun Gothic" pitchFamily="34" charset="-122"/>
+                <a:cs typeface="Malgun Gothic" pitchFamily="34" charset="-120"/>
+              </a:rPr>
+              <a:t>왜</a:t>
+            </a:r>
+            <a:endParaRPr lang="en-US" sz="1300" dirty="0"/>
+          </a:p>
+        </p:txBody>
+      </p:sp>
+      <p:sp>
+        <p:nvSpPr>
+          <p:cNvPr id="10" name="Text 8"/>
+          <p:cNvSpPr/>
+          <p:nvPr/>
+        </p:nvSpPr>
+        <p:spPr>
+          <a:xfrm>
+            <a:off x="868680" y="5166360"/>
+            <a:ext cx="4206240" cy="1051560"/>
+          </a:xfrm>
+          <a:prstGeom prst="rect">
+            <a:avLst/>
+          </a:prstGeom>
+          <a:noFill/>
+          <a:ln/>
+        </p:spPr>
+        <p:txBody>
+          <a:bodyPr wrap="square" lIns="0" tIns="0" rIns="0" bIns="0" rtlCol="0" anchor="t"/>
+          <a:lstStyle/>
+          <a:p>
+            <a:pPr indent="0" marL="0">
+              <a:buNone/>
+            </a:pPr>
+            <a:r>
+              <a:rPr lang="en-US" sz="1250" dirty="0">
+                <a:solidFill>
+                  <a:srgbClr val="33291F"/>
+                </a:solidFill>
+                <a:latin typeface="Malgun Gothic" pitchFamily="34" charset="0"/>
+                <a:ea typeface="Malgun Gothic" pitchFamily="34" charset="-122"/>
+                <a:cs typeface="Malgun Gothic" pitchFamily="34" charset="-120"/>
+              </a:rPr>
+              <a:t>실패·되돌리기도 과정. '실패해도 앱은 정상' 폴백 원칙을 세운 단계.</a:t>
+            </a:r>
+            <a:endParaRPr lang="en-US" sz="1250" dirty="0"/>
+          </a:p>
+        </p:txBody>
+      </p:sp>
+      <p:sp>
+        <p:nvSpPr>
+          <p:cNvPr id="11" name="Shape 9"/>
+          <p:cNvSpPr/>
+          <p:nvPr/>
+        </p:nvSpPr>
+        <p:spPr>
+          <a:xfrm>
+            <a:off x="5760720" y="1691640"/>
+            <a:ext cx="5760720" cy="4617720"/>
+          </a:xfrm>
+          <a:prstGeom prst="roundRect">
+            <a:avLst>
+              <a:gd name="adj" fmla="val 1584"/>
+            </a:avLst>
+          </a:prstGeom>
+          <a:solidFill>
+            <a:srgbClr val="F1E4D3"/>
+          </a:solidFill>
+          <a:ln w="15875">
+            <a:solidFill>
+              <a:srgbClr val="E08A3C"/>
+            </a:solidFill>
+            <a:prstDash val="dash"/>
+          </a:ln>
+        </p:spPr>
+      </p:sp>
+      <p:sp>
+        <p:nvSpPr>
+          <p:cNvPr id="12" name="Text 10"/>
+          <p:cNvSpPr/>
+          <p:nvPr/>
+        </p:nvSpPr>
+        <p:spPr>
+          <a:xfrm>
+            <a:off x="5943600" y="1691640"/>
+            <a:ext cx="5394960" cy="4617720"/>
+          </a:xfrm>
+          <a:prstGeom prst="rect">
+            <a:avLst/>
+          </a:prstGeom>
+          <a:noFill/>
+          <a:ln/>
+        </p:spPr>
+        <p:txBody>
+          <a:bodyPr wrap="square" rtlCol="0" anchor="ctr"/>
+          <a:lstStyle/>
+          <a:p>
+            <a:pPr algn="ctr" indent="0" marL="0">
+              <a:buNone/>
+            </a:pPr>
+            <a:r>
+              <a:rPr lang="en-US" sz="1500" b="1" dirty="0">
+                <a:solidFill>
+                  <a:srgbClr val="5A3A24"/>
+                </a:solidFill>
+                <a:latin typeface="Malgun Gothic" pitchFamily="34" charset="0"/>
+                <a:ea typeface="Malgun Gothic" pitchFamily="34" charset="-122"/>
+                <a:cs typeface="Malgun Gothic" pitchFamily="34" charset="-120"/>
+              </a:rPr>
+              <a:t>📷  스크린샷 자리
+</a:t>
+            </a:r>
+            <a:endParaRPr lang="en-US" sz="1500" dirty="0"/>
+          </a:p>
+          <a:p>
+            <a:pPr algn="ctr" indent="0" marL="0">
+              <a:buNone/>
+            </a:pPr>
+            <a:r>
+              <a:rPr lang="en-US" sz="1200" dirty="0">
+                <a:solidFill>
+                  <a:srgbClr val="5A3A24"/>
+                </a:solidFill>
+                <a:latin typeface="Malgun Gothic" pitchFamily="34" charset="0"/>
+                <a:ea typeface="Malgun Gothic" pitchFamily="34" charset="-122"/>
+                <a:cs typeface="Malgun Gothic" pitchFamily="34" charset="-120"/>
+              </a:rPr>
+              <a:t>localStorage 크래시 → revert → js-eval 재도입
+</a:t>
+            </a:r>
+            <a:endParaRPr lang="en-US" sz="1500" dirty="0"/>
+          </a:p>
+          <a:p>
+            <a:pPr algn="ctr" indent="0" marL="0">
+              <a:buNone/>
+            </a:pPr>
+            <a:r>
+              <a:rPr lang="en-US" sz="950" i="1" dirty="0">
+                <a:solidFill>
+                  <a:srgbClr val="8A7A6B"/>
+                </a:solidFill>
+                <a:latin typeface="Malgun Gothic" pitchFamily="34" charset="0"/>
+                <a:ea typeface="Malgun Gothic" pitchFamily="34" charset="-122"/>
+                <a:cs typeface="Malgun Gothic" pitchFamily="34" charset="-120"/>
+              </a:rPr>
+              <a:t>docs/screenshots/stage9.png 저장 시 자동 삽입</a:t>
+            </a:r>
+            <a:endParaRPr lang="en-US" sz="1500" dirty="0"/>
+          </a:p>
+        </p:txBody>
+      </p:sp>
+    </p:spTree>
+  </p:cSld>
+  <p:clrMapOvr>
+    <a:masterClrMapping/>
+  </p:clrMapOvr>
+</p:sld>
+</file>
+
+<file path=ppt/slides/slide15.xml><?xml version="1.0" encoding="utf-8"?>
+<p:sld xmlns:a="http://schemas.openxmlformats.org/drawingml/2006/main" xmlns:r="http://schemas.openxmlformats.org/officeDocument/2006/relationships" xmlns:p="http://schemas.openxmlformats.org/presentationml/2006/main">
+  <p:cSld name="Slide 15">
+    <p:bg>
+      <p:bgPr>
+        <a:solidFill>
+          <a:srgbClr val="FFFFFF"/>
+        </a:solidFill>
+      </p:bgPr>
+    </p:bg>
+    <p:spTree>
+      <p:nvGrpSpPr>
+        <p:cNvPr id="1" name=""/>
+        <p:cNvGrpSpPr/>
+        <p:nvPr/>
+      </p:nvGrpSpPr>
+      <p:grpSpPr>
+        <a:xfrm>
+          <a:off x="0" y="0"/>
+          <a:ext cx="0" cy="0"/>
+          <a:chOff x="0" y="0"/>
+          <a:chExt cx="0" cy="0"/>
+        </a:xfrm>
+      </p:grpSpPr>
+      <p:sp>
+        <p:nvSpPr>
+          <p:cNvPr id="2" name="Shape 0"/>
+          <p:cNvSpPr/>
+          <p:nvPr/>
+        </p:nvSpPr>
+        <p:spPr>
+          <a:xfrm>
+            <a:off x="640080" y="566928"/>
+            <a:ext cx="658368" cy="658368"/>
+          </a:xfrm>
+          <a:prstGeom prst="ellipse">
+            <a:avLst/>
+          </a:prstGeom>
+          <a:solidFill>
+            <a:srgbClr val="C4622D"/>
+          </a:solidFill>
+          <a:ln/>
+        </p:spPr>
+      </p:sp>
+      <p:sp>
+        <p:nvSpPr>
+          <p:cNvPr id="3" name="Text 1"/>
+          <p:cNvSpPr/>
+          <p:nvPr/>
+        </p:nvSpPr>
+        <p:spPr>
+          <a:xfrm>
+            <a:off x="640080" y="566928"/>
+            <a:ext cx="658368" cy="658368"/>
+          </a:xfrm>
+          <a:prstGeom prst="rect">
+            <a:avLst/>
+          </a:prstGeom>
+          <a:noFill/>
+          <a:ln/>
+        </p:spPr>
+        <p:txBody>
+          <a:bodyPr wrap="square" lIns="0" tIns="0" rIns="0" bIns="0" rtlCol="0" anchor="ctr"/>
+          <a:lstStyle/>
+          <a:p>
+            <a:pPr algn="ctr" indent="0" marL="0">
+              <a:buNone/>
+            </a:pPr>
+            <a:r>
+              <a:rPr lang="en-US" sz="2600" b="1" dirty="0">
+                <a:solidFill>
+                  <a:srgbClr val="FFFFFF"/>
+                </a:solidFill>
+                <a:latin typeface="Malgun Gothic" pitchFamily="34" charset="0"/>
+                <a:ea typeface="Malgun Gothic" pitchFamily="34" charset="-122"/>
+                <a:cs typeface="Malgun Gothic" pitchFamily="34" charset="-120"/>
+              </a:rPr>
+              <a:t>10</a:t>
+            </a:r>
+            <a:endParaRPr lang="en-US" sz="2600" dirty="0"/>
+          </a:p>
+        </p:txBody>
+      </p:sp>
+      <p:sp>
+        <p:nvSpPr>
+          <p:cNvPr id="4" name="Text 2"/>
+          <p:cNvSpPr/>
+          <p:nvPr/>
+        </p:nvSpPr>
+        <p:spPr>
+          <a:xfrm>
+            <a:off x="1508760" y="530352"/>
+            <a:ext cx="7315200" cy="274320"/>
+          </a:xfrm>
+          <a:prstGeom prst="rect">
+            <a:avLst/>
+          </a:prstGeom>
+          <a:noFill/>
+          <a:ln/>
+        </p:spPr>
+        <p:txBody>
+          <a:bodyPr wrap="square" lIns="0" tIns="0" rIns="0" bIns="0" rtlCol="0" anchor="ctr"/>
+          <a:lstStyle/>
+          <a:p>
+            <a:pPr indent="0" marL="0">
+              <a:buNone/>
+            </a:pPr>
+            <a:r>
+              <a:rPr lang="en-US" sz="1150" b="1" spc="100" kern="0" dirty="0">
+                <a:solidFill>
+                  <a:srgbClr val="8A7A6B"/>
+                </a:solidFill>
+                <a:latin typeface="Malgun Gothic" pitchFamily="34" charset="0"/>
+                <a:ea typeface="Malgun Gothic" pitchFamily="34" charset="-122"/>
+                <a:cs typeface="Malgun Gothic" pitchFamily="34" charset="-120"/>
+              </a:rPr>
+              <a:t>STAGE 10 · 2026.07.13</a:t>
+            </a:r>
+            <a:endParaRPr lang="en-US" sz="1150" dirty="0"/>
+          </a:p>
+        </p:txBody>
+      </p:sp>
+      <p:sp>
+        <p:nvSpPr>
+          <p:cNvPr id="5" name="Text 3"/>
+          <p:cNvSpPr/>
+          <p:nvPr/>
+        </p:nvSpPr>
+        <p:spPr>
+          <a:xfrm>
+            <a:off x="1508760" y="786384"/>
+            <a:ext cx="9555480" cy="548640"/>
+          </a:xfrm>
+          <a:prstGeom prst="rect">
+            <a:avLst/>
+          </a:prstGeom>
+          <a:noFill/>
+          <a:ln/>
+        </p:spPr>
+        <p:txBody>
+          <a:bodyPr wrap="square" lIns="0" tIns="0" rIns="0" bIns="0" rtlCol="0" anchor="ctr"/>
+          <a:lstStyle/>
+          <a:p>
+            <a:pPr indent="0" marL="0">
+              <a:buNone/>
+            </a:pPr>
+            <a:r>
+              <a:rPr lang="en-US" sz="2500" b="1" dirty="0">
+                <a:solidFill>
+                  <a:srgbClr val="5A3A24"/>
+                </a:solidFill>
+                <a:latin typeface="Malgun Gothic" pitchFamily="34" charset="0"/>
+                <a:ea typeface="Malgun Gothic" pitchFamily="34" charset="-122"/>
+                <a:cs typeface="Malgun Gothic" pitchFamily="34" charset="-120"/>
+              </a:rPr>
+              <a:t>홈 개인화 · 일정 지능화</a:t>
+            </a:r>
+            <a:endParaRPr lang="en-US" sz="2500" dirty="0"/>
+          </a:p>
+        </p:txBody>
+      </p:sp>
+      <p:sp>
+        <p:nvSpPr>
+          <p:cNvPr id="6" name="Text 4"/>
+          <p:cNvSpPr/>
+          <p:nvPr/>
+        </p:nvSpPr>
+        <p:spPr>
+          <a:xfrm>
+            <a:off x="640080" y="1691640"/>
+            <a:ext cx="4663440" cy="320040"/>
+          </a:xfrm>
+          <a:prstGeom prst="rect">
+            <a:avLst/>
+          </a:prstGeom>
+          <a:noFill/>
+          <a:ln/>
+        </p:spPr>
+        <p:txBody>
+          <a:bodyPr wrap="square" lIns="0" tIns="0" rIns="0" bIns="0" rtlCol="0" anchor="ctr"/>
+          <a:lstStyle/>
+          <a:p>
+            <a:pPr indent="0" marL="0">
+              <a:buNone/>
+            </a:pPr>
+            <a:r>
+              <a:rPr lang="en-US" sz="1400" b="1" dirty="0">
+                <a:solidFill>
+                  <a:srgbClr val="C4622D"/>
+                </a:solidFill>
+                <a:latin typeface="Malgun Gothic" pitchFamily="34" charset="0"/>
+                <a:ea typeface="Malgun Gothic" pitchFamily="34" charset="-122"/>
+                <a:cs typeface="Malgun Gothic" pitchFamily="34" charset="-120"/>
+              </a:rPr>
+              <a:t>무엇을 바꿨나</a:t>
+            </a:r>
+            <a:endParaRPr lang="en-US" sz="1400" dirty="0"/>
+          </a:p>
+        </p:txBody>
+      </p:sp>
+      <p:sp>
+        <p:nvSpPr>
+          <p:cNvPr id="7" name="Text 5"/>
+          <p:cNvSpPr/>
+          <p:nvPr/>
+        </p:nvSpPr>
+        <p:spPr>
+          <a:xfrm>
+            <a:off x="640080" y="2057400"/>
+            <a:ext cx="4663440" cy="2377440"/>
+          </a:xfrm>
+          <a:prstGeom prst="rect">
+            <a:avLst/>
+          </a:prstGeom>
+          <a:noFill/>
+          <a:ln/>
+        </p:spPr>
+        <p:txBody>
+          <a:bodyPr wrap="square" rtlCol="0" anchor="t"/>
+          <a:lstStyle/>
+          <a:p>
+            <a:pPr marL="177800" indent="-177800">
+              <a:spcAft>
+                <a:spcPts val="600"/>
+              </a:spcAft>
+              <a:buSzPct val="100000"/>
+              <a:buChar char="•"/>
+            </a:pPr>
+            <a:r>
+              <a:rPr lang="en-US" sz="1300" dirty="0">
+                <a:solidFill>
+                  <a:srgbClr val="33291F"/>
+                </a:solidFill>
+                <a:latin typeface="Malgun Gothic" pitchFamily="34" charset="0"/>
+                <a:ea typeface="Malgun Gothic" pitchFamily="34" charset="-122"/>
+                <a:cs typeface="Malgun Gothic" pitchFamily="34" charset="-120"/>
+              </a:rPr>
+              <a:t>홈 재편: 오늘 챙길 것(D-0·D-1) / 내 할 일(7일) / 그 외 일정(펼침)</a:t>
+            </a:r>
+            <a:endParaRPr lang="en-US" sz="1300" dirty="0"/>
+          </a:p>
+          <a:p>
+            <a:pPr marL="177800" indent="-177800">
+              <a:spcAft>
+                <a:spcPts val="600"/>
+              </a:spcAft>
+              <a:buSzPct val="100000"/>
+              <a:buChar char="•"/>
+            </a:pPr>
+            <a:r>
+              <a:rPr lang="en-US" sz="1300" dirty="0">
+                <a:solidFill>
+                  <a:srgbClr val="33291F"/>
+                </a:solidFill>
+                <a:latin typeface="Malgun Gothic" pitchFamily="34" charset="0"/>
+                <a:ea typeface="Malgun Gothic" pitchFamily="34" charset="-122"/>
+                <a:cs typeface="Malgun Gothic" pitchFamily="34" charset="-120"/>
+              </a:rPr>
+              <a:t>개인 할 일 ＋(본인만, 캘린더 무관) · 일정 장소칸 + '정보 미입력' 알림(연가·조퇴 제외)</a:t>
+            </a:r>
+            <a:endParaRPr lang="en-US" sz="1300" dirty="0"/>
+          </a:p>
+          <a:p>
+            <a:pPr marL="177800" indent="-177800">
+              <a:spcAft>
+                <a:spcPts val="600"/>
+              </a:spcAft>
+              <a:buSzPct val="100000"/>
+              <a:buChar char="•"/>
+            </a:pPr>
+            <a:r>
+              <a:rPr lang="en-US" sz="1300" dirty="0">
+                <a:solidFill>
+                  <a:srgbClr val="33291F"/>
+                </a:solidFill>
+                <a:latin typeface="Malgun Gothic" pitchFamily="34" charset="0"/>
+                <a:ea typeface="Malgun Gothic" pitchFamily="34" charset="-122"/>
+                <a:cs typeface="Malgun Gothic" pitchFamily="34" charset="-120"/>
+              </a:rPr>
+              <a:t>지난 주간보고 '계획'을 골라 할 일로 가져오기(규칙 기반, AI 없음)</a:t>
+            </a:r>
+            <a:endParaRPr lang="en-US" sz="1300" dirty="0"/>
+          </a:p>
+        </p:txBody>
+      </p:sp>
+      <p:sp>
+        <p:nvSpPr>
+          <p:cNvPr id="8" name="Shape 6"/>
+          <p:cNvSpPr/>
+          <p:nvPr/>
+        </p:nvSpPr>
+        <p:spPr>
+          <a:xfrm>
+            <a:off x="640080" y="4709160"/>
+            <a:ext cx="4663440" cy="1600200"/>
+          </a:xfrm>
+          <a:prstGeom prst="roundRect">
+            <a:avLst>
+              <a:gd name="adj" fmla="val 5143"/>
+            </a:avLst>
+          </a:prstGeom>
+          <a:solidFill>
+            <a:srgbClr val="F7F0E8"/>
+          </a:solidFill>
+          <a:ln w="12700">
+            <a:solidFill>
+              <a:srgbClr val="E4D5C4"/>
+            </a:solidFill>
+            <a:prstDash val="solid"/>
+          </a:ln>
+        </p:spPr>
+      </p:sp>
+      <p:sp>
+        <p:nvSpPr>
+          <p:cNvPr id="9" name="Text 7"/>
+          <p:cNvSpPr/>
+          <p:nvPr/>
+        </p:nvSpPr>
+        <p:spPr>
+          <a:xfrm>
+            <a:off x="868680" y="4846320"/>
+            <a:ext cx="4206240" cy="320040"/>
+          </a:xfrm>
+          <a:prstGeom prst="rect">
+            <a:avLst/>
+          </a:prstGeom>
+          <a:noFill/>
+          <a:ln/>
+        </p:spPr>
+        <p:txBody>
+          <a:bodyPr wrap="square" lIns="0" tIns="0" rIns="0" bIns="0" rtlCol="0" anchor="ctr"/>
+          <a:lstStyle/>
+          <a:p>
+            <a:pPr indent="0" marL="0">
+              <a:buNone/>
+            </a:pPr>
+            <a:r>
+              <a:rPr lang="en-US" sz="1300" b="1" dirty="0">
+                <a:solidFill>
+                  <a:srgbClr val="C4622D"/>
+                </a:solidFill>
+                <a:latin typeface="Malgun Gothic" pitchFamily="34" charset="0"/>
+                <a:ea typeface="Malgun Gothic" pitchFamily="34" charset="-122"/>
+                <a:cs typeface="Malgun Gothic" pitchFamily="34" charset="-120"/>
+              </a:rPr>
+              <a:t>왜</a:t>
+            </a:r>
+            <a:endParaRPr lang="en-US" sz="1300" dirty="0"/>
+          </a:p>
+        </p:txBody>
+      </p:sp>
+      <p:sp>
+        <p:nvSpPr>
+          <p:cNvPr id="10" name="Text 8"/>
+          <p:cNvSpPr/>
+          <p:nvPr/>
+        </p:nvSpPr>
+        <p:spPr>
+          <a:xfrm>
+            <a:off x="868680" y="5166360"/>
+            <a:ext cx="4206240" cy="1051560"/>
+          </a:xfrm>
+          <a:prstGeom prst="rect">
+            <a:avLst/>
+          </a:prstGeom>
+          <a:noFill/>
+          <a:ln/>
+        </p:spPr>
+        <p:txBody>
+          <a:bodyPr wrap="square" lIns="0" tIns="0" rIns="0" bIns="0" rtlCol="0" anchor="t"/>
+          <a:lstStyle/>
+          <a:p>
+            <a:pPr indent="0" marL="0">
+              <a:buNone/>
+            </a:pPr>
+            <a:r>
+              <a:rPr lang="en-US" sz="1250" dirty="0">
+                <a:solidFill>
+                  <a:srgbClr val="33291F"/>
+                </a:solidFill>
+                <a:latin typeface="Malgun Gothic" pitchFamily="34" charset="0"/>
+                <a:ea typeface="Malgun Gothic" pitchFamily="34" charset="-122"/>
+                <a:cs typeface="Malgun Gothic" pitchFamily="34" charset="-120"/>
+              </a:rPr>
+              <a:t>각자 쓰기 좋게 개인화하고, 놓치는 정보(장소·계획)를 앱이 챙겨주게.</a:t>
+            </a:r>
+            <a:endParaRPr lang="en-US" sz="1250" dirty="0"/>
+          </a:p>
+        </p:txBody>
+      </p:sp>
+      <p:sp>
+        <p:nvSpPr>
+          <p:cNvPr id="11" name="Shape 9"/>
+          <p:cNvSpPr/>
+          <p:nvPr/>
+        </p:nvSpPr>
+        <p:spPr>
+          <a:xfrm>
+            <a:off x="5760720" y="1691640"/>
+            <a:ext cx="5760720" cy="4617720"/>
+          </a:xfrm>
+          <a:prstGeom prst="roundRect">
+            <a:avLst>
+              <a:gd name="adj" fmla="val 1584"/>
+            </a:avLst>
+          </a:prstGeom>
+          <a:solidFill>
+            <a:srgbClr val="F1E4D3"/>
+          </a:solidFill>
+          <a:ln w="15875">
+            <a:solidFill>
+              <a:srgbClr val="E08A3C"/>
+            </a:solidFill>
+            <a:prstDash val="dash"/>
+          </a:ln>
+        </p:spPr>
+      </p:sp>
+      <p:sp>
+        <p:nvSpPr>
+          <p:cNvPr id="12" name="Text 10"/>
+          <p:cNvSpPr/>
+          <p:nvPr/>
+        </p:nvSpPr>
+        <p:spPr>
+          <a:xfrm>
+            <a:off x="5943600" y="1691640"/>
+            <a:ext cx="5394960" cy="4617720"/>
+          </a:xfrm>
+          <a:prstGeom prst="rect">
+            <a:avLst/>
+          </a:prstGeom>
+          <a:noFill/>
+          <a:ln/>
+        </p:spPr>
+        <p:txBody>
+          <a:bodyPr wrap="square" rtlCol="0" anchor="ctr"/>
+          <a:lstStyle/>
+          <a:p>
+            <a:pPr algn="ctr" indent="0" marL="0">
+              <a:buNone/>
+            </a:pPr>
+            <a:r>
+              <a:rPr lang="en-US" sz="1500" b="1" dirty="0">
+                <a:solidFill>
+                  <a:srgbClr val="5A3A24"/>
+                </a:solidFill>
+                <a:latin typeface="Malgun Gothic" pitchFamily="34" charset="0"/>
+                <a:ea typeface="Malgun Gothic" pitchFamily="34" charset="-122"/>
+                <a:cs typeface="Malgun Gothic" pitchFamily="34" charset="-120"/>
+              </a:rPr>
+              <a:t>📷  스크린샷 자리
+</a:t>
+            </a:r>
+            <a:endParaRPr lang="en-US" sz="1500" dirty="0"/>
+          </a:p>
+          <a:p>
+            <a:pPr algn="ctr" indent="0" marL="0">
+              <a:buNone/>
+            </a:pPr>
+            <a:r>
+              <a:rPr lang="en-US" sz="1200" dirty="0">
+                <a:solidFill>
+                  <a:srgbClr val="5A3A24"/>
+                </a:solidFill>
+                <a:latin typeface="Malgun Gothic" pitchFamily="34" charset="0"/>
+                <a:ea typeface="Malgun Gothic" pitchFamily="34" charset="-122"/>
+                <a:cs typeface="Malgun Gothic" pitchFamily="34" charset="-120"/>
+              </a:rPr>
+              <a:t>개인 할 일(＋) · 정보 미입력 알림 · 지난 보고 가져오기
+</a:t>
+            </a:r>
+            <a:endParaRPr lang="en-US" sz="1500" dirty="0"/>
+          </a:p>
+          <a:p>
+            <a:pPr algn="ctr" indent="0" marL="0">
+              <a:buNone/>
+            </a:pPr>
+            <a:r>
+              <a:rPr lang="en-US" sz="950" i="1" dirty="0">
+                <a:solidFill>
+                  <a:srgbClr val="8A7A6B"/>
+                </a:solidFill>
+                <a:latin typeface="Malgun Gothic" pitchFamily="34" charset="0"/>
+                <a:ea typeface="Malgun Gothic" pitchFamily="34" charset="-122"/>
+                <a:cs typeface="Malgun Gothic" pitchFamily="34" charset="-120"/>
+              </a:rPr>
+              <a:t>docs/screenshots/stage10.png 저장 시 자동 삽입</a:t>
+            </a:r>
+            <a:endParaRPr lang="en-US" sz="1500" dirty="0"/>
+          </a:p>
+        </p:txBody>
+      </p:sp>
+    </p:spTree>
+  </p:cSld>
+  <p:clrMapOvr>
+    <a:masterClrMapping/>
+  </p:clrMapOvr>
+</p:sld>
+</file>
+
+<file path=ppt/slides/slide16.xml><?xml version="1.0" encoding="utf-8"?>
+<p:sld xmlns:a="http://schemas.openxmlformats.org/drawingml/2006/main" xmlns:r="http://schemas.openxmlformats.org/officeDocument/2006/relationships" xmlns:p="http://schemas.openxmlformats.org/presentationml/2006/main">
+  <p:cSld name="Slide 16">
+    <p:bg>
+      <p:bgPr>
+        <a:solidFill>
           <a:srgbClr val="3E2A1C"/>
         </a:solidFill>
       </p:bgPr>
@@ -4871,7 +6049,7 @@
                 <a:ea typeface="Malgun Gothic" pitchFamily="34" charset="-122"/>
                 <a:cs typeface="Malgun Gothic" pitchFamily="34" charset="-120"/>
               </a:rPr>
-              <a:t>8종 업무를 앱 하나로</a:t>
+              <a:t>8종 업무를 앱 하나로 · 운영비 0원</a:t>
             </a:r>
             <a:endParaRPr lang="en-US" sz="1300" dirty="0"/>
           </a:p>
@@ -4913,7 +6091,7 @@
                 <a:ea typeface="Malgun Gothic" pitchFamily="34" charset="-122"/>
                 <a:cs typeface="Malgun Gothic" pitchFamily="34" charset="-120"/>
               </a:rPr>
-              <a:t>폰에서 앱처럼(홈 화면 추가) · 운영비 0원</a:t>
+              <a:t>폰에서 앱처럼(홈 화면 추가) + 자동 로그인</a:t>
             </a:r>
             <a:endParaRPr lang="en-US" sz="1300" dirty="0"/>
           </a:p>
@@ -4934,7 +6112,7 @@
                 <a:ea typeface="Malgun Gothic" pitchFamily="34" charset="-122"/>
                 <a:cs typeface="Malgun Gothic" pitchFamily="34" charset="-120"/>
               </a:rPr>
-              <a:t>다층 백업으로 데이터 안전</a:t>
+              <a:t>개인 할 일·정보 미입력 알림·보고→할일 가져오기</a:t>
             </a:r>
             <a:endParaRPr lang="en-US" sz="1300" dirty="0"/>
           </a:p>
@@ -5043,7 +6221,7 @@
                 <a:ea typeface="Malgun Gothic" pitchFamily="34" charset="-122"/>
                 <a:cs typeface="Malgun Gothic" pitchFamily="34" charset="-120"/>
               </a:rPr>
-              <a:t>streamlit_app.py 페이지 파일 분리</a:t>
+              <a:t>로컬 AI(미니PC+EXAONE 2.4B)로 계획 스마트 추출</a:t>
             </a:r>
             <a:endParaRPr lang="en-US" sz="1300" dirty="0"/>
           </a:p>
@@ -5064,7 +6242,7 @@
                 <a:ea typeface="Malgun Gothic" pitchFamily="34" charset="-122"/>
                 <a:cs typeface="Malgun Gothic" pitchFamily="34" charset="-120"/>
               </a:rPr>
-              <a:t>모바일 최적화 2차 · 자동로그인 신뢰성</a:t>
+              <a:t>streamlit_app.py 페이지 파일 분리</a:t>
             </a:r>
             <a:endParaRPr lang="en-US" sz="1300" dirty="0"/>
           </a:p>
@@ -7992,7 +9170,7 @@
         <p:spPr>
           <a:xfrm>
             <a:off x="640080" y="1481328"/>
-            <a:ext cx="10515600" cy="365760"/>
+            <a:ext cx="10881360" cy="365760"/>
           </a:xfrm>
           <a:prstGeom prst="rect">
             <a:avLst/>
@@ -8016,7 +9194,7 @@
                 <a:ea typeface="Malgun Gothic" pitchFamily="34" charset="-122"/>
                 <a:cs typeface="Malgun Gothic" pitchFamily="34" charset="-120"/>
               </a:rPr>
-              <a:t>"처음엔 이랬는데 → 이렇게 → 또 이렇게 …"  총 100여 커밋의 흐름</a:t>
+              <a:t>"처음엔 이랬는데 → 이렇게 → 또 이렇게 …"  총 160여 커밋의 흐름 (막다른 길·되돌리기도 과정)</a:t>
             </a:r>
             <a:endParaRPr lang="en-US" sz="1400" dirty="0"/>
           </a:p>
@@ -8030,8 +9208,8 @@
         </p:nvSpPr>
         <p:spPr>
           <a:xfrm>
-            <a:off x="1320165" y="3200400"/>
-            <a:ext cx="9521190" cy="0"/>
+            <a:off x="1184148" y="3200400"/>
+            <a:ext cx="9793224" cy="0"/>
           </a:xfrm>
           <a:prstGeom prst="line">
             <a:avLst/>
@@ -8053,7 +9231,7 @@
         </p:nvSpPr>
         <p:spPr>
           <a:xfrm>
-            <a:off x="1027557" y="2907792"/>
+            <a:off x="891540" y="2907792"/>
             <a:ext cx="585216" cy="585216"/>
           </a:xfrm>
           <a:prstGeom prst="ellipse">
@@ -8078,7 +9256,7 @@
         </p:nvSpPr>
         <p:spPr>
           <a:xfrm>
-            <a:off x="1027557" y="2907792"/>
+            <a:off x="891540" y="2907792"/>
             <a:ext cx="585216" cy="585216"/>
           </a:xfrm>
           <a:prstGeom prst="rect">
@@ -8118,7 +9296,7 @@
         <p:spPr>
           <a:xfrm>
             <a:off x="731520" y="3657600"/>
-            <a:ext cx="1177290" cy="640080"/>
+            <a:ext cx="905256" cy="640080"/>
           </a:xfrm>
           <a:prstGeom prst="rect">
             <a:avLst/>
@@ -8157,7 +9335,7 @@
         <p:spPr>
           <a:xfrm>
             <a:off x="731520" y="2468880"/>
-            <a:ext cx="1177290" cy="320040"/>
+            <a:ext cx="905256" cy="320040"/>
           </a:xfrm>
           <a:prstGeom prst="rect">
             <a:avLst/>
@@ -8195,7 +9373,7 @@
         </p:nvSpPr>
         <p:spPr>
           <a:xfrm>
-            <a:off x="2387727" y="2907792"/>
+            <a:off x="1979676" y="2907792"/>
             <a:ext cx="585216" cy="585216"/>
           </a:xfrm>
           <a:prstGeom prst="ellipse">
@@ -8220,7 +9398,7 @@
         </p:nvSpPr>
         <p:spPr>
           <a:xfrm>
-            <a:off x="2387727" y="2907792"/>
+            <a:off x="1979676" y="2907792"/>
             <a:ext cx="585216" cy="585216"/>
           </a:xfrm>
           <a:prstGeom prst="rect">
@@ -8259,8 +9437,8 @@
         </p:nvSpPr>
         <p:spPr>
           <a:xfrm>
-            <a:off x="2091690" y="3657600"/>
-            <a:ext cx="1177290" cy="640080"/>
+            <a:off x="1819656" y="3657600"/>
+            <a:ext cx="905256" cy="640080"/>
           </a:xfrm>
           <a:prstGeom prst="rect">
             <a:avLst/>
@@ -8298,8 +9476,8 @@
         </p:nvSpPr>
         <p:spPr>
           <a:xfrm>
-            <a:off x="2091690" y="2468880"/>
-            <a:ext cx="1177290" cy="320040"/>
+            <a:off x="1819656" y="2468880"/>
+            <a:ext cx="905256" cy="320040"/>
           </a:xfrm>
           <a:prstGeom prst="rect">
             <a:avLst/>
@@ -8337,7 +9515,7 @@
         </p:nvSpPr>
         <p:spPr>
           <a:xfrm>
-            <a:off x="3747897" y="2907792"/>
+            <a:off x="3067812" y="2907792"/>
             <a:ext cx="585216" cy="585216"/>
           </a:xfrm>
           <a:prstGeom prst="ellipse">
@@ -8362,7 +9540,7 @@
         </p:nvSpPr>
         <p:spPr>
           <a:xfrm>
-            <a:off x="3747897" y="2907792"/>
+            <a:off x="3067812" y="2907792"/>
             <a:ext cx="585216" cy="585216"/>
           </a:xfrm>
           <a:prstGeom prst="rect">
@@ -8401,8 +9579,8 @@
         </p:nvSpPr>
         <p:spPr>
           <a:xfrm>
-            <a:off x="3451860" y="3657600"/>
-            <a:ext cx="1177290" cy="640080"/>
+            <a:off x="2907792" y="3657600"/>
+            <a:ext cx="905256" cy="640080"/>
           </a:xfrm>
           <a:prstGeom prst="rect">
             <a:avLst/>
@@ -8440,8 +9618,8 @@
         </p:nvSpPr>
         <p:spPr>
           <a:xfrm>
-            <a:off x="3451860" y="2468880"/>
-            <a:ext cx="1177290" cy="320040"/>
+            <a:off x="2907792" y="2468880"/>
+            <a:ext cx="905256" cy="320040"/>
           </a:xfrm>
           <a:prstGeom prst="rect">
             <a:avLst/>
@@ -8479,7 +9657,7 @@
         </p:nvSpPr>
         <p:spPr>
           <a:xfrm>
-            <a:off x="5108067" y="2907792"/>
+            <a:off x="4155948" y="2907792"/>
             <a:ext cx="585216" cy="585216"/>
           </a:xfrm>
           <a:prstGeom prst="ellipse">
@@ -8504,7 +9682,7 @@
         </p:nvSpPr>
         <p:spPr>
           <a:xfrm>
-            <a:off x="5108067" y="2907792"/>
+            <a:off x="4155948" y="2907792"/>
             <a:ext cx="585216" cy="585216"/>
           </a:xfrm>
           <a:prstGeom prst="rect">
@@ -8543,8 +9721,8 @@
         </p:nvSpPr>
         <p:spPr>
           <a:xfrm>
-            <a:off x="4812030" y="3657600"/>
-            <a:ext cx="1177290" cy="640080"/>
+            <a:off x="3995928" y="3657600"/>
+            <a:ext cx="905256" cy="640080"/>
           </a:xfrm>
           <a:prstGeom prst="rect">
             <a:avLst/>
@@ -8582,8 +9760,8 @@
         </p:nvSpPr>
         <p:spPr>
           <a:xfrm>
-            <a:off x="4812030" y="2468880"/>
-            <a:ext cx="1177290" cy="320040"/>
+            <a:off x="3995928" y="2468880"/>
+            <a:ext cx="905256" cy="320040"/>
           </a:xfrm>
           <a:prstGeom prst="rect">
             <a:avLst/>
@@ -8621,7 +9799,7 @@
         </p:nvSpPr>
         <p:spPr>
           <a:xfrm>
-            <a:off x="6468237" y="2907792"/>
+            <a:off x="5244084" y="2907792"/>
             <a:ext cx="585216" cy="585216"/>
           </a:xfrm>
           <a:prstGeom prst="ellipse">
@@ -8646,7 +9824,7 @@
         </p:nvSpPr>
         <p:spPr>
           <a:xfrm>
-            <a:off x="6468237" y="2907792"/>
+            <a:off x="5244084" y="2907792"/>
             <a:ext cx="585216" cy="585216"/>
           </a:xfrm>
           <a:prstGeom prst="rect">
@@ -8685,8 +9863,8 @@
         </p:nvSpPr>
         <p:spPr>
           <a:xfrm>
-            <a:off x="6172200" y="3657600"/>
-            <a:ext cx="1177290" cy="640080"/>
+            <a:off x="5084064" y="3657600"/>
+            <a:ext cx="905256" cy="640080"/>
           </a:xfrm>
           <a:prstGeom prst="rect">
             <a:avLst/>
@@ -8724,8 +9902,8 @@
         </p:nvSpPr>
         <p:spPr>
           <a:xfrm>
-            <a:off x="6172200" y="2468880"/>
-            <a:ext cx="1177290" cy="320040"/>
+            <a:off x="5084064" y="2468880"/>
+            <a:ext cx="905256" cy="320040"/>
           </a:xfrm>
           <a:prstGeom prst="rect">
             <a:avLst/>
@@ -8763,7 +9941,7 @@
         </p:nvSpPr>
         <p:spPr>
           <a:xfrm>
-            <a:off x="7828407" y="2907792"/>
+            <a:off x="6332220" y="2907792"/>
             <a:ext cx="585216" cy="585216"/>
           </a:xfrm>
           <a:prstGeom prst="ellipse">
@@ -8788,7 +9966,7 @@
         </p:nvSpPr>
         <p:spPr>
           <a:xfrm>
-            <a:off x="7828407" y="2907792"/>
+            <a:off x="6332220" y="2907792"/>
             <a:ext cx="585216" cy="585216"/>
           </a:xfrm>
           <a:prstGeom prst="rect">
@@ -8827,8 +10005,8 @@
         </p:nvSpPr>
         <p:spPr>
           <a:xfrm>
-            <a:off x="7532370" y="3657600"/>
-            <a:ext cx="1177290" cy="640080"/>
+            <a:off x="6172200" y="3657600"/>
+            <a:ext cx="905256" cy="640080"/>
           </a:xfrm>
           <a:prstGeom prst="rect">
             <a:avLst/>
@@ -8866,8 +10044,8 @@
         </p:nvSpPr>
         <p:spPr>
           <a:xfrm>
-            <a:off x="7532370" y="2468880"/>
-            <a:ext cx="1177290" cy="320040"/>
+            <a:off x="6172200" y="2468880"/>
+            <a:ext cx="905256" cy="320040"/>
           </a:xfrm>
           <a:prstGeom prst="rect">
             <a:avLst/>
@@ -8905,7 +10083,7 @@
         </p:nvSpPr>
         <p:spPr>
           <a:xfrm>
-            <a:off x="9188577" y="2907792"/>
+            <a:off x="7420356" y="2907792"/>
             <a:ext cx="585216" cy="585216"/>
           </a:xfrm>
           <a:prstGeom prst="ellipse">
@@ -8930,7 +10108,7 @@
         </p:nvSpPr>
         <p:spPr>
           <a:xfrm>
-            <a:off x="9188577" y="2907792"/>
+            <a:off x="7420356" y="2907792"/>
             <a:ext cx="585216" cy="585216"/>
           </a:xfrm>
           <a:prstGeom prst="rect">
@@ -8969,8 +10147,8 @@
         </p:nvSpPr>
         <p:spPr>
           <a:xfrm>
-            <a:off x="8892540" y="3657600"/>
-            <a:ext cx="1177290" cy="640080"/>
+            <a:off x="7260336" y="3657600"/>
+            <a:ext cx="905256" cy="640080"/>
           </a:xfrm>
           <a:prstGeom prst="rect">
             <a:avLst/>
@@ -9008,8 +10186,8 @@
         </p:nvSpPr>
         <p:spPr>
           <a:xfrm>
-            <a:off x="8892540" y="2468880"/>
-            <a:ext cx="1177290" cy="320040"/>
+            <a:off x="7260336" y="2468880"/>
+            <a:ext cx="905256" cy="320040"/>
           </a:xfrm>
           <a:prstGeom prst="rect">
             <a:avLst/>
@@ -9047,7 +10225,7 @@
         </p:nvSpPr>
         <p:spPr>
           <a:xfrm>
-            <a:off x="10548747" y="2907792"/>
+            <a:off x="8508492" y="2907792"/>
             <a:ext cx="585216" cy="585216"/>
           </a:xfrm>
           <a:prstGeom prst="ellipse">
@@ -9072,7 +10250,7 @@
         </p:nvSpPr>
         <p:spPr>
           <a:xfrm>
-            <a:off x="10548747" y="2907792"/>
+            <a:off x="8508492" y="2907792"/>
             <a:ext cx="585216" cy="585216"/>
           </a:xfrm>
           <a:prstGeom prst="rect">
@@ -9111,8 +10289,8 @@
         </p:nvSpPr>
         <p:spPr>
           <a:xfrm>
-            <a:off x="10252710" y="3657600"/>
-            <a:ext cx="1177290" cy="640080"/>
+            <a:off x="8348472" y="3657600"/>
+            <a:ext cx="905256" cy="640080"/>
           </a:xfrm>
           <a:prstGeom prst="rect">
             <a:avLst/>
@@ -9150,8 +10328,8 @@
         </p:nvSpPr>
         <p:spPr>
           <a:xfrm>
-            <a:off x="10252710" y="2468880"/>
-            <a:ext cx="1177290" cy="320040"/>
+            <a:off x="8348472" y="2468880"/>
+            <a:ext cx="905256" cy="320040"/>
           </a:xfrm>
           <a:prstGeom prst="rect">
             <a:avLst/>
@@ -9183,7 +10361,291 @@
       </p:sp>
       <p:sp>
         <p:nvSpPr>
-          <p:cNvPr id="38" name="Text 36"/>
+          <p:cNvPr id="38" name="Shape 36"/>
+          <p:cNvSpPr/>
+          <p:nvPr/>
+        </p:nvSpPr>
+        <p:spPr>
+          <a:xfrm>
+            <a:off x="9596628" y="2907792"/>
+            <a:ext cx="585216" cy="585216"/>
+          </a:xfrm>
+          <a:prstGeom prst="ellipse">
+            <a:avLst/>
+          </a:prstGeom>
+          <a:solidFill>
+            <a:srgbClr val="C4622D"/>
+          </a:solidFill>
+          <a:ln w="19050">
+            <a:solidFill>
+              <a:srgbClr val="F4EBE1"/>
+            </a:solidFill>
+            <a:prstDash val="solid"/>
+          </a:ln>
+        </p:spPr>
+      </p:sp>
+      <p:sp>
+        <p:nvSpPr>
+          <p:cNvPr id="39" name="Text 37"/>
+          <p:cNvSpPr/>
+          <p:nvPr/>
+        </p:nvSpPr>
+        <p:spPr>
+          <a:xfrm>
+            <a:off x="9596628" y="2907792"/>
+            <a:ext cx="585216" cy="585216"/>
+          </a:xfrm>
+          <a:prstGeom prst="rect">
+            <a:avLst/>
+          </a:prstGeom>
+          <a:noFill/>
+          <a:ln/>
+        </p:spPr>
+        <p:txBody>
+          <a:bodyPr wrap="square" lIns="0" tIns="0" rIns="0" bIns="0" rtlCol="0" anchor="ctr"/>
+          <a:lstStyle/>
+          <a:p>
+            <a:pPr algn="ctr" indent="0" marL="0">
+              <a:buNone/>
+            </a:pPr>
+            <a:r>
+              <a:rPr lang="en-US" sz="1800" b="1" dirty="0">
+                <a:solidFill>
+                  <a:srgbClr val="FFFFFF"/>
+                </a:solidFill>
+                <a:latin typeface="Malgun Gothic" pitchFamily="34" charset="0"/>
+                <a:ea typeface="Malgun Gothic" pitchFamily="34" charset="-122"/>
+                <a:cs typeface="Malgun Gothic" pitchFamily="34" charset="-120"/>
+              </a:rPr>
+              <a:t>9</a:t>
+            </a:r>
+            <a:endParaRPr lang="en-US" sz="1800" dirty="0"/>
+          </a:p>
+        </p:txBody>
+      </p:sp>
+      <p:sp>
+        <p:nvSpPr>
+          <p:cNvPr id="40" name="Text 38"/>
+          <p:cNvSpPr/>
+          <p:nvPr/>
+        </p:nvSpPr>
+        <p:spPr>
+          <a:xfrm>
+            <a:off x="9436608" y="3657600"/>
+            <a:ext cx="905256" cy="640080"/>
+          </a:xfrm>
+          <a:prstGeom prst="rect">
+            <a:avLst/>
+          </a:prstGeom>
+          <a:noFill/>
+          <a:ln/>
+        </p:spPr>
+        <p:txBody>
+          <a:bodyPr wrap="square" lIns="0" tIns="0" rIns="0" bIns="0" rtlCol="0" anchor="t"/>
+          <a:lstStyle/>
+          <a:p>
+            <a:pPr algn="ctr" indent="0" marL="0">
+              <a:buNone/>
+            </a:pPr>
+            <a:r>
+              <a:rPr lang="en-US" sz="1250" b="1" dirty="0">
+                <a:solidFill>
+                  <a:srgbClr val="F4EBE1"/>
+                </a:solidFill>
+                <a:latin typeface="Malgun Gothic" pitchFamily="34" charset="0"/>
+                <a:ea typeface="Malgun Gothic" pitchFamily="34" charset="-122"/>
+                <a:cs typeface="Malgun Gothic" pitchFamily="34" charset="-120"/>
+              </a:rPr>
+              <a:t>폰·자동로그인</a:t>
+            </a:r>
+            <a:endParaRPr lang="en-US" sz="1250" dirty="0"/>
+          </a:p>
+        </p:txBody>
+      </p:sp>
+      <p:sp>
+        <p:nvSpPr>
+          <p:cNvPr id="41" name="Text 39"/>
+          <p:cNvSpPr/>
+          <p:nvPr/>
+        </p:nvSpPr>
+        <p:spPr>
+          <a:xfrm>
+            <a:off x="9436608" y="2468880"/>
+            <a:ext cx="905256" cy="320040"/>
+          </a:xfrm>
+          <a:prstGeom prst="rect">
+            <a:avLst/>
+          </a:prstGeom>
+          <a:noFill/>
+          <a:ln/>
+        </p:spPr>
+        <p:txBody>
+          <a:bodyPr wrap="square" lIns="0" tIns="0" rIns="0" bIns="0" rtlCol="0" anchor="ctr"/>
+          <a:lstStyle/>
+          <a:p>
+            <a:pPr algn="ctr" indent="0" marL="0">
+              <a:buNone/>
+            </a:pPr>
+            <a:r>
+              <a:rPr lang="en-US" sz="1100" dirty="0">
+                <a:solidFill>
+                  <a:srgbClr val="E08A3C"/>
+                </a:solidFill>
+                <a:latin typeface="Malgun Gothic" pitchFamily="34" charset="0"/>
+                <a:ea typeface="Malgun Gothic" pitchFamily="34" charset="-122"/>
+                <a:cs typeface="Malgun Gothic" pitchFamily="34" charset="-120"/>
+              </a:rPr>
+              <a:t>07.09</a:t>
+            </a:r>
+            <a:endParaRPr lang="en-US" sz="1100" dirty="0"/>
+          </a:p>
+        </p:txBody>
+      </p:sp>
+      <p:sp>
+        <p:nvSpPr>
+          <p:cNvPr id="42" name="Shape 40"/>
+          <p:cNvSpPr/>
+          <p:nvPr/>
+        </p:nvSpPr>
+        <p:spPr>
+          <a:xfrm>
+            <a:off x="10684764" y="2907792"/>
+            <a:ext cx="585216" cy="585216"/>
+          </a:xfrm>
+          <a:prstGeom prst="ellipse">
+            <a:avLst/>
+          </a:prstGeom>
+          <a:solidFill>
+            <a:srgbClr val="C4622D"/>
+          </a:solidFill>
+          <a:ln w="19050">
+            <a:solidFill>
+              <a:srgbClr val="F4EBE1"/>
+            </a:solidFill>
+            <a:prstDash val="solid"/>
+          </a:ln>
+        </p:spPr>
+      </p:sp>
+      <p:sp>
+        <p:nvSpPr>
+          <p:cNvPr id="43" name="Text 41"/>
+          <p:cNvSpPr/>
+          <p:nvPr/>
+        </p:nvSpPr>
+        <p:spPr>
+          <a:xfrm>
+            <a:off x="10684764" y="2907792"/>
+            <a:ext cx="585216" cy="585216"/>
+          </a:xfrm>
+          <a:prstGeom prst="rect">
+            <a:avLst/>
+          </a:prstGeom>
+          <a:noFill/>
+          <a:ln/>
+        </p:spPr>
+        <p:txBody>
+          <a:bodyPr wrap="square" lIns="0" tIns="0" rIns="0" bIns="0" rtlCol="0" anchor="ctr"/>
+          <a:lstStyle/>
+          <a:p>
+            <a:pPr algn="ctr" indent="0" marL="0">
+              <a:buNone/>
+            </a:pPr>
+            <a:r>
+              <a:rPr lang="en-US" sz="1800" b="1" dirty="0">
+                <a:solidFill>
+                  <a:srgbClr val="FFFFFF"/>
+                </a:solidFill>
+                <a:latin typeface="Malgun Gothic" pitchFamily="34" charset="0"/>
+                <a:ea typeface="Malgun Gothic" pitchFamily="34" charset="-122"/>
+                <a:cs typeface="Malgun Gothic" pitchFamily="34" charset="-120"/>
+              </a:rPr>
+              <a:t>10</a:t>
+            </a:r>
+            <a:endParaRPr lang="en-US" sz="1800" dirty="0"/>
+          </a:p>
+        </p:txBody>
+      </p:sp>
+      <p:sp>
+        <p:nvSpPr>
+          <p:cNvPr id="44" name="Text 42"/>
+          <p:cNvSpPr/>
+          <p:nvPr/>
+        </p:nvSpPr>
+        <p:spPr>
+          <a:xfrm>
+            <a:off x="10524744" y="3657600"/>
+            <a:ext cx="905256" cy="640080"/>
+          </a:xfrm>
+          <a:prstGeom prst="rect">
+            <a:avLst/>
+          </a:prstGeom>
+          <a:noFill/>
+          <a:ln/>
+        </p:spPr>
+        <p:txBody>
+          <a:bodyPr wrap="square" lIns="0" tIns="0" rIns="0" bIns="0" rtlCol="0" anchor="t"/>
+          <a:lstStyle/>
+          <a:p>
+            <a:pPr algn="ctr" indent="0" marL="0">
+              <a:buNone/>
+            </a:pPr>
+            <a:r>
+              <a:rPr lang="en-US" sz="1250" b="1" dirty="0">
+                <a:solidFill>
+                  <a:srgbClr val="F4EBE1"/>
+                </a:solidFill>
+                <a:latin typeface="Malgun Gothic" pitchFamily="34" charset="0"/>
+                <a:ea typeface="Malgun Gothic" pitchFamily="34" charset="-122"/>
+                <a:cs typeface="Malgun Gothic" pitchFamily="34" charset="-120"/>
+              </a:rPr>
+              <a:t>홈개인화·일정AI</a:t>
+            </a:r>
+            <a:endParaRPr lang="en-US" sz="1250" dirty="0"/>
+          </a:p>
+        </p:txBody>
+      </p:sp>
+      <p:sp>
+        <p:nvSpPr>
+          <p:cNvPr id="45" name="Text 43"/>
+          <p:cNvSpPr/>
+          <p:nvPr/>
+        </p:nvSpPr>
+        <p:spPr>
+          <a:xfrm>
+            <a:off x="10524744" y="2468880"/>
+            <a:ext cx="905256" cy="320040"/>
+          </a:xfrm>
+          <a:prstGeom prst="rect">
+            <a:avLst/>
+          </a:prstGeom>
+          <a:noFill/>
+          <a:ln/>
+        </p:spPr>
+        <p:txBody>
+          <a:bodyPr wrap="square" lIns="0" tIns="0" rIns="0" bIns="0" rtlCol="0" anchor="ctr"/>
+          <a:lstStyle/>
+          <a:p>
+            <a:pPr algn="ctr" indent="0" marL="0">
+              <a:buNone/>
+            </a:pPr>
+            <a:r>
+              <a:rPr lang="en-US" sz="1100" dirty="0">
+                <a:solidFill>
+                  <a:srgbClr val="E08A3C"/>
+                </a:solidFill>
+                <a:latin typeface="Malgun Gothic" pitchFamily="34" charset="0"/>
+                <a:ea typeface="Malgun Gothic" pitchFamily="34" charset="-122"/>
+                <a:cs typeface="Malgun Gothic" pitchFamily="34" charset="-120"/>
+              </a:rPr>
+              <a:t>07.13</a:t>
+            </a:r>
+            <a:endParaRPr lang="en-US" sz="1100" dirty="0"/>
+          </a:p>
+        </p:txBody>
+      </p:sp>
+      <p:sp>
+        <p:nvSpPr>
+          <p:cNvPr id="46" name="Text 44"/>
           <p:cNvSpPr/>
           <p:nvPr/>
         </p:nvSpPr>
